--- a/data-eng/decks/w4d4s4.pptx
+++ b/data-eng/decks/w4d4s4.pptx
@@ -14,6 +14,7 @@
     <p:sldId id="262" r:id="rId13"/>
     <p:sldId id="263" r:id="rId14"/>
     <p:sldId id="264" r:id="rId15"/>
+    <p:sldId id="265" r:id="rId16"/>
   </p:sldIdLst>
   <p:sldSz cx="18288000" cy="10287000" type="screen4x3"/>
   <p:notesSz cx="6858000" cy="9144000"/>
@@ -3098,7 +3099,7 @@
       <p:grpSpPr/>
       <p:sp>
         <p:nvSpPr>
-          <p:cNvPr id="2" name="Oval 1"/>
+          <p:cNvPr id="2" name="deckgen:decor"/>
           <p:cNvSpPr/>
           <p:nvPr/>
         </p:nvSpPr>
@@ -3128,7 +3129,7 @@
       </p:sp>
       <p:sp>
         <p:nvSpPr>
-          <p:cNvPr id="3" name="Oval 2"/>
+          <p:cNvPr id="3" name="deckgen:decor"/>
           <p:cNvSpPr/>
           <p:nvPr/>
         </p:nvSpPr>
@@ -3158,7 +3159,7 @@
       </p:sp>
       <p:sp>
         <p:nvSpPr>
-          <p:cNvPr id="4" name="Oval 3"/>
+          <p:cNvPr id="4" name="deckgen:decor"/>
           <p:cNvSpPr/>
           <p:nvPr/>
         </p:nvSpPr>
@@ -3188,7 +3189,7 @@
       </p:sp>
       <p:sp>
         <p:nvSpPr>
-          <p:cNvPr id="5" name="Rectangle 4"/>
+          <p:cNvPr id="5" name="deckgen:decor"/>
           <p:cNvSpPr/>
           <p:nvPr/>
         </p:nvSpPr>
@@ -3218,7 +3219,7 @@
       </p:sp>
       <p:sp>
         <p:nvSpPr>
-          <p:cNvPr id="6" name="Oval 5"/>
+          <p:cNvPr id="6" name="deckgen:decor"/>
           <p:cNvSpPr/>
           <p:nvPr/>
         </p:nvSpPr>
@@ -3248,7 +3249,7 @@
       </p:sp>
       <p:sp>
         <p:nvSpPr>
-          <p:cNvPr id="7" name="Oval 6"/>
+          <p:cNvPr id="7" name="deckgen:decor"/>
           <p:cNvSpPr/>
           <p:nvPr/>
         </p:nvSpPr>
@@ -3278,7 +3279,7 @@
       </p:sp>
       <p:sp>
         <p:nvSpPr>
-          <p:cNvPr id="8" name="Oval 7"/>
+          <p:cNvPr id="8" name="deckgen:decor"/>
           <p:cNvSpPr/>
           <p:nvPr/>
         </p:nvSpPr>
@@ -3308,7 +3309,7 @@
       </p:sp>
       <p:sp>
         <p:nvSpPr>
-          <p:cNvPr id="9" name="Oval 8"/>
+          <p:cNvPr id="9" name="deckgen:decor"/>
           <p:cNvSpPr/>
           <p:nvPr/>
         </p:nvSpPr>
@@ -3338,7 +3339,7 @@
       </p:sp>
       <p:sp>
         <p:nvSpPr>
-          <p:cNvPr id="10" name="Rectangle 9"/>
+          <p:cNvPr id="10" name="deckgen:decor"/>
           <p:cNvSpPr/>
           <p:nvPr/>
         </p:nvSpPr>
@@ -3574,6 +3575,813 @@
                 <a:cs typeface="Pretendard"/>
               </a:rPr>
               <a:t>데이터 엔지니어링 &amp; RAG 파이프라인 160H · 3기</a:t>
+            </a:r>
+          </a:p>
+        </p:txBody>
+      </p:sp>
+    </p:spTree>
+  </p:cSld>
+  <p:clrMapOvr>
+    <a:masterClrMapping/>
+  </p:clrMapOvr>
+</p:sld>
+</file>
+
+<file path=ppt/slides/slide10.xml><?xml version="1.0" encoding="utf-8"?>
+<p:sld xmlns:a="http://schemas.openxmlformats.org/drawingml/2006/main" xmlns:p="http://schemas.openxmlformats.org/presentationml/2006/main" xmlns:r="http://schemas.openxmlformats.org/officeDocument/2006/relationships">
+  <p:cSld>
+    <p:spTree>
+      <p:nvGrpSpPr>
+        <p:cNvPr id="1" name=""/>
+        <p:cNvGrpSpPr/>
+        <p:nvPr/>
+      </p:nvGrpSpPr>
+      <p:grpSpPr/>
+      <p:sp>
+        <p:nvSpPr>
+          <p:cNvPr id="2" name="deckgen:decor"/>
+          <p:cNvSpPr/>
+          <p:nvPr/>
+        </p:nvSpPr>
+        <p:spPr>
+          <a:xfrm>
+            <a:off x="14859000" y="6667500"/>
+            <a:ext cx="5905500" cy="5905500"/>
+          </a:xfrm>
+          <a:prstGeom prst="ellipse">
+            <a:avLst/>
+          </a:prstGeom>
+          <a:solidFill>
+            <a:srgbClr val="F3F6FC"/>
+          </a:solidFill>
+          <a:ln>
+            <a:noFill/>
+          </a:ln>
+          <a:effectLst/>
+        </p:spPr>
+        <p:txBody>
+          <a:bodyPr rtlCol="0" anchor="ctr" wrap="square"/>
+          <a:lstStyle/>
+          <a:p>
+            <a:pPr algn="ctr"/>
+          </a:p>
+        </p:txBody>
+      </p:sp>
+      <p:sp>
+        <p:nvSpPr>
+          <p:cNvPr id="3" name="deckgen:decor"/>
+          <p:cNvSpPr/>
+          <p:nvPr/>
+        </p:nvSpPr>
+        <p:spPr>
+          <a:xfrm>
+            <a:off x="-2095500" y="-2095500"/>
+            <a:ext cx="4381500" cy="4381500"/>
+          </a:xfrm>
+          <a:prstGeom prst="ellipse">
+            <a:avLst/>
+          </a:prstGeom>
+          <a:solidFill>
+            <a:srgbClr val="F5F6F8"/>
+          </a:solidFill>
+          <a:ln>
+            <a:noFill/>
+          </a:ln>
+          <a:effectLst/>
+        </p:spPr>
+        <p:txBody>
+          <a:bodyPr rtlCol="0" anchor="ctr" wrap="square"/>
+          <a:lstStyle/>
+          <a:p>
+            <a:pPr algn="ctr"/>
+          </a:p>
+        </p:txBody>
+      </p:sp>
+      <p:sp>
+        <p:nvSpPr>
+          <p:cNvPr id="4" name="Rectangle 3"/>
+          <p:cNvSpPr/>
+          <p:nvPr/>
+        </p:nvSpPr>
+        <p:spPr>
+          <a:xfrm>
+            <a:off x="1143000" y="2857500"/>
+            <a:ext cx="16002000" cy="28575"/>
+          </a:xfrm>
+          <a:prstGeom prst="rect">
+            <a:avLst/>
+          </a:prstGeom>
+          <a:solidFill>
+            <a:srgbClr val="0D2B5E"/>
+          </a:solidFill>
+          <a:ln>
+            <a:noFill/>
+          </a:ln>
+          <a:effectLst/>
+        </p:spPr>
+        <p:txBody>
+          <a:bodyPr rtlCol="0" anchor="ctr" wrap="square"/>
+          <a:lstStyle/>
+          <a:p>
+            <a:pPr algn="ctr"/>
+          </a:p>
+        </p:txBody>
+      </p:sp>
+      <p:sp>
+        <p:nvSpPr>
+          <p:cNvPr id="5" name="TextBox 4"/>
+          <p:cNvSpPr txBox="1"/>
+          <p:nvPr/>
+        </p:nvSpPr>
+        <p:spPr>
+          <a:xfrm>
+            <a:off x="1143000" y="3352800"/>
+            <a:ext cx="8572500" cy="419100"/>
+          </a:xfrm>
+          <a:prstGeom prst="rect">
+            <a:avLst/>
+          </a:prstGeom>
+          <a:noFill/>
+        </p:spPr>
+        <p:txBody>
+          <a:bodyPr wrap="square" lIns="0" rIns="0" tIns="0" bIns="0" anchor="t">
+            <a:spAutoFit/>
+          </a:bodyPr>
+          <a:lstStyle/>
+          <a:p>
+            <a:pPr algn="l">
+              <a:lnSpc>
+                <a:spcPct val="100000"/>
+              </a:lnSpc>
+            </a:pPr>
+            <a:r>
+              <a:rPr sz="2400" b="1">
+                <a:solidFill>
+                  <a:srgbClr val="1E5BC6"/>
+                </a:solidFill>
+                <a:latin typeface="Pretendard"/>
+                <a:ea typeface="Pretendard"/>
+                <a:cs typeface="Pretendard"/>
+              </a:rPr>
+              <a:t>4-4 · 정리·회고 0.5H 마무리</a:t>
+            </a:r>
+          </a:p>
+        </p:txBody>
+      </p:sp>
+      <p:sp>
+        <p:nvSpPr>
+          <p:cNvPr id="6" name="TextBox 5"/>
+          <p:cNvSpPr txBox="1"/>
+          <p:nvPr/>
+        </p:nvSpPr>
+        <p:spPr>
+          <a:xfrm>
+            <a:off x="1143000" y="3771900"/>
+            <a:ext cx="16002000" cy="800100"/>
+          </a:xfrm>
+          <a:prstGeom prst="rect">
+            <a:avLst/>
+          </a:prstGeom>
+          <a:noFill/>
+        </p:spPr>
+        <p:txBody>
+          <a:bodyPr wrap="square" lIns="0" rIns="0" tIns="0" bIns="0" anchor="t">
+            <a:spAutoFit/>
+          </a:bodyPr>
+          <a:lstStyle/>
+          <a:p>
+            <a:pPr algn="l">
+              <a:lnSpc>
+                <a:spcPct val="100000"/>
+              </a:lnSpc>
+            </a:pPr>
+            <a:r>
+              <a:rPr sz="5100" b="1">
+                <a:solidFill>
+                  <a:srgbClr val="0D2B5E"/>
+                </a:solidFill>
+                <a:latin typeface="Pretendard"/>
+                <a:ea typeface="Pretendard"/>
+                <a:cs typeface="Pretendard"/>
+              </a:rPr>
+              <a:t>다음 회차는 10-22(목) 4-5 레이크하우스 통합</a:t>
+            </a:r>
+          </a:p>
+        </p:txBody>
+      </p:sp>
+      <p:sp>
+        <p:nvSpPr>
+          <p:cNvPr id="7" name="TextBox 6"/>
+          <p:cNvSpPr txBox="1"/>
+          <p:nvPr/>
+        </p:nvSpPr>
+        <p:spPr>
+          <a:xfrm>
+            <a:off x="1143000" y="4724400"/>
+            <a:ext cx="16002000" cy="438150"/>
+          </a:xfrm>
+          <a:prstGeom prst="rect">
+            <a:avLst/>
+          </a:prstGeom>
+          <a:noFill/>
+        </p:spPr>
+        <p:txBody>
+          <a:bodyPr wrap="square" lIns="0" rIns="0" tIns="0" bIns="0" anchor="t">
+            <a:spAutoFit/>
+          </a:bodyPr>
+          <a:lstStyle/>
+          <a:p>
+            <a:pPr algn="l">
+              <a:lnSpc>
+                <a:spcPct val="130000"/>
+              </a:lnSpc>
+            </a:pPr>
+            <a:r>
+              <a:rPr sz="2400" b="0">
+                <a:solidFill>
+                  <a:srgbClr val="3D3D3D"/>
+                </a:solidFill>
+                <a:latin typeface="Pretendard"/>
+                <a:ea typeface="Pretendard"/>
+                <a:cs typeface="Pretendard"/>
+              </a:rPr>
+              <a:t>카탈로그를 축으로 Spark·Trino 상호운용을 검증하고, 아키텍처 다이어그램과 Trino 쿼리 스크립트를 주차 산출물로 완성합니다</a:t>
+            </a:r>
+          </a:p>
+        </p:txBody>
+      </p:sp>
+      <p:sp>
+        <p:nvSpPr>
+          <p:cNvPr id="8" name="Rounded Rectangle 7"/>
+          <p:cNvSpPr/>
+          <p:nvPr/>
+        </p:nvSpPr>
+        <p:spPr>
+          <a:xfrm>
+            <a:off x="1143000" y="5257800"/>
+            <a:ext cx="7772400" cy="819150"/>
+          </a:xfrm>
+          <a:prstGeom prst="roundRect">
+            <a:avLst>
+              <a:gd name="adj" fmla="val 6976"/>
+            </a:avLst>
+          </a:prstGeom>
+          <a:solidFill>
+            <a:srgbClr val="FAFBFD"/>
+          </a:solidFill>
+          <a:ln w="9525">
+            <a:solidFill>
+              <a:srgbClr val="DCE1E8"/>
+            </a:solidFill>
+          </a:ln>
+          <a:effectLst/>
+        </p:spPr>
+        <p:txBody>
+          <a:bodyPr rtlCol="0" anchor="ctr" wrap="square"/>
+          <a:lstStyle/>
+          <a:p>
+            <a:pPr algn="ctr"/>
+          </a:p>
+        </p:txBody>
+      </p:sp>
+      <p:sp>
+        <p:nvSpPr>
+          <p:cNvPr id="9" name="TextBox 8"/>
+          <p:cNvSpPr txBox="1"/>
+          <p:nvPr/>
+        </p:nvSpPr>
+        <p:spPr>
+          <a:xfrm>
+            <a:off x="1428750" y="5486400"/>
+            <a:ext cx="419100" cy="381000"/>
+          </a:xfrm>
+          <a:prstGeom prst="rect">
+            <a:avLst/>
+          </a:prstGeom>
+          <a:noFill/>
+        </p:spPr>
+        <p:txBody>
+          <a:bodyPr wrap="square" lIns="0" rIns="0" tIns="0" bIns="0" anchor="t">
+            <a:spAutoFit/>
+          </a:bodyPr>
+          <a:lstStyle/>
+          <a:p>
+            <a:pPr algn="l">
+              <a:lnSpc>
+                <a:spcPct val="100000"/>
+              </a:lnSpc>
+            </a:pPr>
+            <a:r>
+              <a:rPr sz="2475" b="1">
+                <a:solidFill>
+                  <a:srgbClr val="1E5BC6"/>
+                </a:solidFill>
+                <a:latin typeface="Pretendard"/>
+                <a:ea typeface="Pretendard"/>
+                <a:cs typeface="Pretendard"/>
+              </a:rPr>
+              <a:t>✓</a:t>
+            </a:r>
+          </a:p>
+        </p:txBody>
+      </p:sp>
+      <p:sp>
+        <p:nvSpPr>
+          <p:cNvPr id="10" name="TextBox 9"/>
+          <p:cNvSpPr txBox="1"/>
+          <p:nvPr/>
+        </p:nvSpPr>
+        <p:spPr>
+          <a:xfrm>
+            <a:off x="1905000" y="5486400"/>
+            <a:ext cx="6724650" cy="381000"/>
+          </a:xfrm>
+          <a:prstGeom prst="rect">
+            <a:avLst/>
+          </a:prstGeom>
+          <a:noFill/>
+        </p:spPr>
+        <p:txBody>
+          <a:bodyPr wrap="square" lIns="0" rIns="0" tIns="0" bIns="0" anchor="t">
+            <a:spAutoFit/>
+          </a:bodyPr>
+          <a:lstStyle/>
+          <a:p>
+            <a:pPr algn="l">
+              <a:lnSpc>
+                <a:spcPct val="100000"/>
+              </a:lnSpc>
+            </a:pPr>
+            <a:r>
+              <a:rPr sz="2475" b="1">
+                <a:solidFill>
+                  <a:srgbClr val="0D2B5E"/>
+                </a:solidFill>
+                <a:latin typeface="Pretendard"/>
+                <a:ea typeface="Pretendard"/>
+                <a:cs typeface="Pretendard"/>
+              </a:rPr>
+              <a:t>카탈로그가 단일 진실 원천인 이유</a:t>
+            </a:r>
+          </a:p>
+        </p:txBody>
+      </p:sp>
+      <p:sp>
+        <p:nvSpPr>
+          <p:cNvPr id="11" name="Rounded Rectangle 10"/>
+          <p:cNvSpPr/>
+          <p:nvPr/>
+        </p:nvSpPr>
+        <p:spPr>
+          <a:xfrm>
+            <a:off x="9372600" y="5257800"/>
+            <a:ext cx="7772400" cy="819150"/>
+          </a:xfrm>
+          <a:prstGeom prst="roundRect">
+            <a:avLst>
+              <a:gd name="adj" fmla="val 6976"/>
+            </a:avLst>
+          </a:prstGeom>
+          <a:solidFill>
+            <a:srgbClr val="FAFBFD"/>
+          </a:solidFill>
+          <a:ln w="9525">
+            <a:solidFill>
+              <a:srgbClr val="DCE1E8"/>
+            </a:solidFill>
+          </a:ln>
+          <a:effectLst/>
+        </p:spPr>
+        <p:txBody>
+          <a:bodyPr rtlCol="0" anchor="ctr" wrap="square"/>
+          <a:lstStyle/>
+          <a:p>
+            <a:pPr algn="ctr"/>
+          </a:p>
+        </p:txBody>
+      </p:sp>
+      <p:sp>
+        <p:nvSpPr>
+          <p:cNvPr id="12" name="TextBox 11"/>
+          <p:cNvSpPr txBox="1"/>
+          <p:nvPr/>
+        </p:nvSpPr>
+        <p:spPr>
+          <a:xfrm>
+            <a:off x="9658350" y="5486400"/>
+            <a:ext cx="419100" cy="381000"/>
+          </a:xfrm>
+          <a:prstGeom prst="rect">
+            <a:avLst/>
+          </a:prstGeom>
+          <a:noFill/>
+        </p:spPr>
+        <p:txBody>
+          <a:bodyPr wrap="square" lIns="0" rIns="0" tIns="0" bIns="0" anchor="t">
+            <a:spAutoFit/>
+          </a:bodyPr>
+          <a:lstStyle/>
+          <a:p>
+            <a:pPr algn="l">
+              <a:lnSpc>
+                <a:spcPct val="100000"/>
+              </a:lnSpc>
+            </a:pPr>
+            <a:r>
+              <a:rPr sz="2475" b="1">
+                <a:solidFill>
+                  <a:srgbClr val="1E5BC6"/>
+                </a:solidFill>
+                <a:latin typeface="Pretendard"/>
+                <a:ea typeface="Pretendard"/>
+                <a:cs typeface="Pretendard"/>
+              </a:rPr>
+              <a:t>✓</a:t>
+            </a:r>
+          </a:p>
+        </p:txBody>
+      </p:sp>
+      <p:sp>
+        <p:nvSpPr>
+          <p:cNvPr id="13" name="TextBox 12"/>
+          <p:cNvSpPr txBox="1"/>
+          <p:nvPr/>
+        </p:nvSpPr>
+        <p:spPr>
+          <a:xfrm>
+            <a:off x="10134600" y="5486400"/>
+            <a:ext cx="6724650" cy="381000"/>
+          </a:xfrm>
+          <a:prstGeom prst="rect">
+            <a:avLst/>
+          </a:prstGeom>
+          <a:noFill/>
+        </p:spPr>
+        <p:txBody>
+          <a:bodyPr wrap="square" lIns="0" rIns="0" tIns="0" bIns="0" anchor="t">
+            <a:spAutoFit/>
+          </a:bodyPr>
+          <a:lstStyle/>
+          <a:p>
+            <a:pPr algn="l">
+              <a:lnSpc>
+                <a:spcPct val="100000"/>
+              </a:lnSpc>
+            </a:pPr>
+            <a:r>
+              <a:rPr sz="2475" b="1">
+                <a:solidFill>
+                  <a:srgbClr val="0D2B5E"/>
+                </a:solidFill>
+                <a:latin typeface="Pretendard"/>
+                <a:ea typeface="Pretendard"/>
+                <a:cs typeface="Pretendard"/>
+              </a:rPr>
+              <a:t>REST 카탈로그·Hive Metastore·AWS Glue 비교</a:t>
+            </a:r>
+          </a:p>
+        </p:txBody>
+      </p:sp>
+      <p:sp>
+        <p:nvSpPr>
+          <p:cNvPr id="14" name="Rounded Rectangle 13"/>
+          <p:cNvSpPr/>
+          <p:nvPr/>
+        </p:nvSpPr>
+        <p:spPr>
+          <a:xfrm>
+            <a:off x="1143000" y="6286500"/>
+            <a:ext cx="7772400" cy="819150"/>
+          </a:xfrm>
+          <a:prstGeom prst="roundRect">
+            <a:avLst>
+              <a:gd name="adj" fmla="val 6976"/>
+            </a:avLst>
+          </a:prstGeom>
+          <a:solidFill>
+            <a:srgbClr val="FAFBFD"/>
+          </a:solidFill>
+          <a:ln w="9525">
+            <a:solidFill>
+              <a:srgbClr val="DCE1E8"/>
+            </a:solidFill>
+          </a:ln>
+          <a:effectLst/>
+        </p:spPr>
+        <p:txBody>
+          <a:bodyPr rtlCol="0" anchor="ctr" wrap="square"/>
+          <a:lstStyle/>
+          <a:p>
+            <a:pPr algn="ctr"/>
+          </a:p>
+        </p:txBody>
+      </p:sp>
+      <p:sp>
+        <p:nvSpPr>
+          <p:cNvPr id="15" name="TextBox 14"/>
+          <p:cNvSpPr txBox="1"/>
+          <p:nvPr/>
+        </p:nvSpPr>
+        <p:spPr>
+          <a:xfrm>
+            <a:off x="1428750" y="6515100"/>
+            <a:ext cx="419100" cy="381000"/>
+          </a:xfrm>
+          <a:prstGeom prst="rect">
+            <a:avLst/>
+          </a:prstGeom>
+          <a:noFill/>
+        </p:spPr>
+        <p:txBody>
+          <a:bodyPr wrap="square" lIns="0" rIns="0" tIns="0" bIns="0" anchor="t">
+            <a:spAutoFit/>
+          </a:bodyPr>
+          <a:lstStyle/>
+          <a:p>
+            <a:pPr algn="l">
+              <a:lnSpc>
+                <a:spcPct val="100000"/>
+              </a:lnSpc>
+            </a:pPr>
+            <a:r>
+              <a:rPr sz="2475" b="1">
+                <a:solidFill>
+                  <a:srgbClr val="1E5BC6"/>
+                </a:solidFill>
+                <a:latin typeface="Pretendard"/>
+                <a:ea typeface="Pretendard"/>
+                <a:cs typeface="Pretendard"/>
+              </a:rPr>
+              <a:t>✓</a:t>
+            </a:r>
+          </a:p>
+        </p:txBody>
+      </p:sp>
+      <p:sp>
+        <p:nvSpPr>
+          <p:cNvPr id="16" name="TextBox 15"/>
+          <p:cNvSpPr txBox="1"/>
+          <p:nvPr/>
+        </p:nvSpPr>
+        <p:spPr>
+          <a:xfrm>
+            <a:off x="1905000" y="6515100"/>
+            <a:ext cx="6724650" cy="381000"/>
+          </a:xfrm>
+          <a:prstGeom prst="rect">
+            <a:avLst/>
+          </a:prstGeom>
+          <a:noFill/>
+        </p:spPr>
+        <p:txBody>
+          <a:bodyPr wrap="square" lIns="0" rIns="0" tIns="0" bIns="0" anchor="t">
+            <a:spAutoFit/>
+          </a:bodyPr>
+          <a:lstStyle/>
+          <a:p>
+            <a:pPr algn="l">
+              <a:lnSpc>
+                <a:spcPct val="100000"/>
+              </a:lnSpc>
+            </a:pPr>
+            <a:r>
+              <a:rPr sz="2475" b="1">
+                <a:solidFill>
+                  <a:srgbClr val="0D2B5E"/>
+                </a:solidFill>
+                <a:latin typeface="Pretendard"/>
+                <a:ea typeface="Pretendard"/>
+                <a:cs typeface="Pretendard"/>
+              </a:rPr>
+              <a:t>같은 카탈로그로 읽고 쓰는 것을 검증</a:t>
+            </a:r>
+          </a:p>
+        </p:txBody>
+      </p:sp>
+      <p:sp>
+        <p:nvSpPr>
+          <p:cNvPr id="17" name="Rounded Rectangle 16"/>
+          <p:cNvSpPr/>
+          <p:nvPr/>
+        </p:nvSpPr>
+        <p:spPr>
+          <a:xfrm>
+            <a:off x="9372600" y="6286500"/>
+            <a:ext cx="7772400" cy="819150"/>
+          </a:xfrm>
+          <a:prstGeom prst="roundRect">
+            <a:avLst>
+              <a:gd name="adj" fmla="val 6976"/>
+            </a:avLst>
+          </a:prstGeom>
+          <a:solidFill>
+            <a:srgbClr val="FAFBFD"/>
+          </a:solidFill>
+          <a:ln w="9525">
+            <a:solidFill>
+              <a:srgbClr val="DCE1E8"/>
+            </a:solidFill>
+          </a:ln>
+          <a:effectLst/>
+        </p:spPr>
+        <p:txBody>
+          <a:bodyPr rtlCol="0" anchor="ctr" wrap="square"/>
+          <a:lstStyle/>
+          <a:p>
+            <a:pPr algn="ctr"/>
+          </a:p>
+        </p:txBody>
+      </p:sp>
+      <p:sp>
+        <p:nvSpPr>
+          <p:cNvPr id="18" name="TextBox 17"/>
+          <p:cNvSpPr txBox="1"/>
+          <p:nvPr/>
+        </p:nvSpPr>
+        <p:spPr>
+          <a:xfrm>
+            <a:off x="9658350" y="6515100"/>
+            <a:ext cx="419100" cy="381000"/>
+          </a:xfrm>
+          <a:prstGeom prst="rect">
+            <a:avLst/>
+          </a:prstGeom>
+          <a:noFill/>
+        </p:spPr>
+        <p:txBody>
+          <a:bodyPr wrap="square" lIns="0" rIns="0" tIns="0" bIns="0" anchor="t">
+            <a:spAutoFit/>
+          </a:bodyPr>
+          <a:lstStyle/>
+          <a:p>
+            <a:pPr algn="l">
+              <a:lnSpc>
+                <a:spcPct val="100000"/>
+              </a:lnSpc>
+            </a:pPr>
+            <a:r>
+              <a:rPr sz="2475" b="1">
+                <a:solidFill>
+                  <a:srgbClr val="1E5BC6"/>
+                </a:solidFill>
+                <a:latin typeface="Pretendard"/>
+                <a:ea typeface="Pretendard"/>
+                <a:cs typeface="Pretendard"/>
+              </a:rPr>
+              <a:t>✓</a:t>
+            </a:r>
+          </a:p>
+        </p:txBody>
+      </p:sp>
+      <p:sp>
+        <p:nvSpPr>
+          <p:cNvPr id="19" name="TextBox 18"/>
+          <p:cNvSpPr txBox="1"/>
+          <p:nvPr/>
+        </p:nvSpPr>
+        <p:spPr>
+          <a:xfrm>
+            <a:off x="10134600" y="6515100"/>
+            <a:ext cx="6724650" cy="381000"/>
+          </a:xfrm>
+          <a:prstGeom prst="rect">
+            <a:avLst/>
+          </a:prstGeom>
+          <a:noFill/>
+        </p:spPr>
+        <p:txBody>
+          <a:bodyPr wrap="square" lIns="0" rIns="0" tIns="0" bIns="0" anchor="t">
+            <a:spAutoFit/>
+          </a:bodyPr>
+          <a:lstStyle/>
+          <a:p>
+            <a:pPr algn="l">
+              <a:lnSpc>
+                <a:spcPct val="100000"/>
+              </a:lnSpc>
+            </a:pPr>
+            <a:r>
+              <a:rPr sz="2475" b="1">
+                <a:solidFill>
+                  <a:srgbClr val="0D2B5E"/>
+                </a:solidFill>
+                <a:latin typeface="Pretendard"/>
+                <a:ea typeface="Pretendard"/>
+                <a:cs typeface="Pretendard"/>
+              </a:rPr>
+              <a:t>아키텍처 다이어그램 한 장 + 쿼리 스크립트</a:t>
+            </a:r>
+          </a:p>
+        </p:txBody>
+      </p:sp>
+      <p:sp>
+        <p:nvSpPr>
+          <p:cNvPr id="20" name="Rectangle 19"/>
+          <p:cNvSpPr/>
+          <p:nvPr/>
+        </p:nvSpPr>
+        <p:spPr>
+          <a:xfrm>
+            <a:off x="1143000" y="7715250"/>
+            <a:ext cx="47625" cy="819150"/>
+          </a:xfrm>
+          <a:prstGeom prst="rect">
+            <a:avLst/>
+          </a:prstGeom>
+          <a:solidFill>
+            <a:srgbClr val="1E5BC6"/>
+          </a:solidFill>
+          <a:ln>
+            <a:noFill/>
+          </a:ln>
+          <a:effectLst/>
+        </p:spPr>
+        <p:txBody>
+          <a:bodyPr rtlCol="0" anchor="ctr" wrap="square"/>
+          <a:lstStyle/>
+          <a:p>
+            <a:pPr algn="ctr"/>
+          </a:p>
+        </p:txBody>
+      </p:sp>
+      <p:sp>
+        <p:nvSpPr>
+          <p:cNvPr id="21" name="TextBox 20"/>
+          <p:cNvSpPr txBox="1"/>
+          <p:nvPr/>
+        </p:nvSpPr>
+        <p:spPr>
+          <a:xfrm>
+            <a:off x="1409700" y="7734300"/>
+            <a:ext cx="8572500" cy="304800"/>
+          </a:xfrm>
+          <a:prstGeom prst="rect">
+            <a:avLst/>
+          </a:prstGeom>
+          <a:noFill/>
+        </p:spPr>
+        <p:txBody>
+          <a:bodyPr wrap="square" lIns="0" rIns="0" tIns="0" bIns="0" anchor="t">
+            <a:spAutoFit/>
+          </a:bodyPr>
+          <a:lstStyle/>
+          <a:p>
+            <a:pPr algn="l">
+              <a:lnSpc>
+                <a:spcPct val="100000"/>
+              </a:lnSpc>
+            </a:pPr>
+            <a:r>
+              <a:rPr sz="1800" b="1" spc="140">
+                <a:solidFill>
+                  <a:srgbClr val="1E5BC6"/>
+                </a:solidFill>
+                <a:latin typeface="Pretendard"/>
+                <a:ea typeface="Pretendard"/>
+                <a:cs typeface="Pretendard"/>
+              </a:rPr>
+              <a:t>준비할 것</a:t>
+            </a:r>
+          </a:p>
+        </p:txBody>
+      </p:sp>
+      <p:sp>
+        <p:nvSpPr>
+          <p:cNvPr id="22" name="TextBox 21"/>
+          <p:cNvSpPr txBox="1"/>
+          <p:nvPr/>
+        </p:nvSpPr>
+        <p:spPr>
+          <a:xfrm>
+            <a:off x="1409700" y="8077200"/>
+            <a:ext cx="8572500" cy="400050"/>
+          </a:xfrm>
+          <a:prstGeom prst="rect">
+            <a:avLst/>
+          </a:prstGeom>
+          <a:noFill/>
+        </p:spPr>
+        <p:txBody>
+          <a:bodyPr wrap="square" lIns="0" rIns="0" tIns="0" bIns="0" anchor="t">
+            <a:spAutoFit/>
+          </a:bodyPr>
+          <a:lstStyle/>
+          <a:p>
+            <a:pPr algn="l">
+              <a:lnSpc>
+                <a:spcPct val="100000"/>
+              </a:lnSpc>
+            </a:pPr>
+            <a:r>
+              <a:rPr sz="2400" b="1">
+                <a:solidFill>
+                  <a:srgbClr val="0D2B5E"/>
+                </a:solidFill>
+                <a:latin typeface="Pretendard"/>
+                <a:ea typeface="Pretendard"/>
+                <a:cs typeface="Pretendard"/>
+              </a:rPr>
+              <a:t>컨테이너 5개 Up · 양쪽 1행 조회 확인</a:t>
             </a:r>
           </a:p>
         </p:txBody>
@@ -3598,7 +4406,7 @@
       <p:grpSpPr/>
       <p:sp>
         <p:nvSpPr>
-          <p:cNvPr id="2" name="Oval 1"/>
+          <p:cNvPr id="2" name="deckgen:decor"/>
           <p:cNvSpPr/>
           <p:nvPr/>
         </p:nvSpPr>
@@ -3628,7 +4436,7 @@
       </p:sp>
       <p:sp>
         <p:nvSpPr>
-          <p:cNvPr id="3" name="Oval 2"/>
+          <p:cNvPr id="3" name="deckgen:decor"/>
           <p:cNvSpPr/>
           <p:nvPr/>
         </p:nvSpPr>
@@ -3658,7 +4466,7 @@
       </p:sp>
       <p:sp>
         <p:nvSpPr>
-          <p:cNvPr id="4" name="Oval 3"/>
+          <p:cNvPr id="4" name="deckgen:decor"/>
           <p:cNvSpPr/>
           <p:nvPr/>
         </p:nvSpPr>
@@ -4085,7 +4893,7 @@
                 <a:ea typeface="Pretendard"/>
                 <a:cs typeface="Pretendard"/>
               </a:rPr>
-              <a:t>컨테이너 5개와 두 엔진의 count 6 으로 4-5 준비를 확인한다</a:t>
+              <a:t>다섯 Up · 두 엔진 count 6 으로 4-5 준비를 확인한다</a:t>
             </a:r>
           </a:p>
         </p:txBody>
@@ -4231,7 +5039,7 @@
                 <a:ea typeface="Pretendard"/>
                 <a:cs typeface="Pretendard"/>
               </a:rPr>
-              <a:t>자주 겪는 오류 네 가지의 원인과 해결을 안다</a:t>
+              <a:t>자주 겪는 오류 여섯 가지의 원인과 해결을 안다</a:t>
             </a:r>
           </a:p>
         </p:txBody>
@@ -4589,7 +5397,7 @@
       <p:grpSpPr/>
       <p:sp>
         <p:nvSpPr>
-          <p:cNvPr id="2" name="Oval 1"/>
+          <p:cNvPr id="2" name="deckgen:decor"/>
           <p:cNvSpPr/>
           <p:nvPr/>
         </p:nvSpPr>
@@ -4619,7 +5427,7 @@
       </p:sp>
       <p:sp>
         <p:nvSpPr>
-          <p:cNvPr id="3" name="Oval 2"/>
+          <p:cNvPr id="3" name="deckgen:decor"/>
           <p:cNvSpPr/>
           <p:nvPr/>
         </p:nvSpPr>
@@ -4649,7 +5457,7 @@
       </p:sp>
       <p:sp>
         <p:nvSpPr>
-          <p:cNvPr id="4" name="Oval 3"/>
+          <p:cNvPr id="4" name="deckgen:decor"/>
           <p:cNvSpPr/>
           <p:nvPr/>
         </p:nvSpPr>
@@ -5505,7 +6313,7 @@
       <p:grpSpPr/>
       <p:sp>
         <p:nvSpPr>
-          <p:cNvPr id="2" name="Oval 1"/>
+          <p:cNvPr id="2" name="deckgen:decor"/>
           <p:cNvSpPr/>
           <p:nvPr/>
         </p:nvSpPr>
@@ -5535,7 +6343,7 @@
       </p:sp>
       <p:sp>
         <p:nvSpPr>
-          <p:cNvPr id="3" name="Oval 2"/>
+          <p:cNvPr id="3" name="deckgen:decor"/>
           <p:cNvSpPr/>
           <p:nvPr/>
         </p:nvSpPr>
@@ -5565,7 +6373,7 @@
       </p:sp>
       <p:sp>
         <p:nvSpPr>
-          <p:cNvPr id="4" name="Oval 3"/>
+          <p:cNvPr id="4" name="deckgen:decor"/>
           <p:cNvSpPr/>
           <p:nvPr/>
         </p:nvSpPr>
@@ -5714,11 +6522,11 @@
         <p:spPr>
           <a:xfrm>
             <a:off x="1143000" y="2933700"/>
-            <a:ext cx="11430000" cy="1095375"/>
+            <a:ext cx="16002000" cy="1000125"/>
           </a:xfrm>
           <a:prstGeom prst="roundRect">
             <a:avLst>
-              <a:gd name="adj" fmla="val 4347"/>
+              <a:gd name="adj" fmla="val 4761"/>
             </a:avLst>
           </a:prstGeom>
           <a:solidFill>
@@ -5747,7 +6555,7 @@
         </p:nvSpPr>
         <p:spPr>
           <a:xfrm>
-            <a:off x="1447800" y="3181350"/>
+            <a:off x="1447800" y="3138488"/>
             <a:ext cx="590550" cy="590550"/>
           </a:xfrm>
           <a:prstGeom prst="ellipse">
@@ -5777,7 +6585,7 @@
         </p:nvSpPr>
         <p:spPr>
           <a:xfrm>
-            <a:off x="1447800" y="3333750"/>
+            <a:off x="1447800" y="3290888"/>
             <a:ext cx="590550" cy="323850"/>
           </a:xfrm>
           <a:prstGeom prst="rect">
@@ -5818,8 +6626,8 @@
         </p:nvSpPr>
         <p:spPr>
           <a:xfrm>
-            <a:off x="2324100" y="3143250"/>
-            <a:ext cx="9906000" cy="400050"/>
+            <a:off x="2324100" y="3024188"/>
+            <a:ext cx="14478000" cy="400050"/>
           </a:xfrm>
           <a:prstGeom prst="rect">
             <a:avLst/>
@@ -5846,7 +6654,7 @@
                 <a:ea typeface="Pretendard"/>
                 <a:cs typeface="Pretendard"/>
               </a:rPr>
-              <a:t>컨테이너 5개가 Up 인가</a:t>
+              <a:t>컨테이너 다섯이 Up 인가</a:t>
             </a:r>
           </a:p>
         </p:txBody>
@@ -5859,8 +6667,8 @@
         </p:nvSpPr>
         <p:spPr>
           <a:xfrm>
-            <a:off x="2324100" y="3543300"/>
-            <a:ext cx="9906000" cy="361950"/>
+            <a:off x="2324100" y="3481388"/>
+            <a:ext cx="14478000" cy="361950"/>
           </a:xfrm>
           <a:prstGeom prst="rect">
             <a:avLst/>
@@ -5900,12 +6708,12 @@
         </p:nvSpPr>
         <p:spPr>
           <a:xfrm>
-            <a:off x="1143000" y="4200525"/>
-            <a:ext cx="11430000" cy="1095375"/>
+            <a:off x="1143000" y="4105275"/>
+            <a:ext cx="16002000" cy="1000125"/>
           </a:xfrm>
           <a:prstGeom prst="roundRect">
             <a:avLst>
-              <a:gd name="adj" fmla="val 4347"/>
+              <a:gd name="adj" fmla="val 4761"/>
             </a:avLst>
           </a:prstGeom>
           <a:solidFill>
@@ -5934,7 +6742,7 @@
         </p:nvSpPr>
         <p:spPr>
           <a:xfrm>
-            <a:off x="1447800" y="4448175"/>
+            <a:off x="1447800" y="4310062"/>
             <a:ext cx="590550" cy="590550"/>
           </a:xfrm>
           <a:prstGeom prst="ellipse">
@@ -5964,7 +6772,7 @@
         </p:nvSpPr>
         <p:spPr>
           <a:xfrm>
-            <a:off x="1447800" y="4600575"/>
+            <a:off x="1447800" y="4462462"/>
             <a:ext cx="590550" cy="323850"/>
           </a:xfrm>
           <a:prstGeom prst="rect">
@@ -6005,8 +6813,8 @@
         </p:nvSpPr>
         <p:spPr>
           <a:xfrm>
-            <a:off x="2324100" y="4410075"/>
-            <a:ext cx="9906000" cy="400050"/>
+            <a:off x="2324100" y="4195762"/>
+            <a:ext cx="14478000" cy="400050"/>
           </a:xfrm>
           <a:prstGeom prst="rect">
             <a:avLst/>
@@ -6033,7 +6841,7 @@
                 <a:ea typeface="Pretendard"/>
                 <a:cs typeface="Pretendard"/>
               </a:rPr>
-              <a:t>Trino 의 count</a:t>
+              <a:t>Trino 의 count → "6"</a:t>
             </a:r>
           </a:p>
         </p:txBody>
@@ -6046,8 +6854,8 @@
         </p:nvSpPr>
         <p:spPr>
           <a:xfrm>
-            <a:off x="2324100" y="4810125"/>
-            <a:ext cx="9906000" cy="361950"/>
+            <a:off x="2324100" y="4652962"/>
+            <a:ext cx="14478000" cy="361950"/>
           </a:xfrm>
           <a:prstGeom prst="rect">
             <a:avLst/>
@@ -6087,12 +6895,12 @@
         </p:nvSpPr>
         <p:spPr>
           <a:xfrm>
-            <a:off x="1143000" y="5467350"/>
-            <a:ext cx="11430000" cy="1095375"/>
+            <a:off x="1143000" y="5276850"/>
+            <a:ext cx="16002000" cy="1000125"/>
           </a:xfrm>
           <a:prstGeom prst="roundRect">
             <a:avLst>
-              <a:gd name="adj" fmla="val 4347"/>
+              <a:gd name="adj" fmla="val 4761"/>
             </a:avLst>
           </a:prstGeom>
           <a:solidFill>
@@ -6121,7 +6929,7 @@
         </p:nvSpPr>
         <p:spPr>
           <a:xfrm>
-            <a:off x="1447800" y="5715000"/>
+            <a:off x="1447800" y="5481638"/>
             <a:ext cx="590550" cy="590550"/>
           </a:xfrm>
           <a:prstGeom prst="ellipse">
@@ -6151,7 +6959,7 @@
         </p:nvSpPr>
         <p:spPr>
           <a:xfrm>
-            <a:off x="1447800" y="5867400"/>
+            <a:off x="1447800" y="5634038"/>
             <a:ext cx="590550" cy="323850"/>
           </a:xfrm>
           <a:prstGeom prst="rect">
@@ -6192,8 +7000,8 @@
         </p:nvSpPr>
         <p:spPr>
           <a:xfrm>
-            <a:off x="2324100" y="5676900"/>
-            <a:ext cx="9906000" cy="400050"/>
+            <a:off x="2324100" y="5367338"/>
+            <a:ext cx="14478000" cy="400050"/>
           </a:xfrm>
           <a:prstGeom prst="rect">
             <a:avLst/>
@@ -6220,7 +7028,7 @@
                 <a:ea typeface="Pretendard"/>
                 <a:cs typeface="Pretendard"/>
               </a:rPr>
-              <a:t>Spark 의 count</a:t>
+              <a:t>Spark 의 count → 6</a:t>
             </a:r>
           </a:p>
         </p:txBody>
@@ -6233,8 +7041,8 @@
         </p:nvSpPr>
         <p:spPr>
           <a:xfrm>
-            <a:off x="2324100" y="6076950"/>
-            <a:ext cx="9906000" cy="361950"/>
+            <a:off x="2324100" y="5824538"/>
+            <a:ext cx="14478000" cy="361950"/>
           </a:xfrm>
           <a:prstGeom prst="rect">
             <a:avLst/>
@@ -6274,12 +7082,12 @@
         </p:nvSpPr>
         <p:spPr>
           <a:xfrm>
-            <a:off x="1143000" y="6734175"/>
-            <a:ext cx="11430000" cy="1095375"/>
+            <a:off x="1143000" y="6448425"/>
+            <a:ext cx="16002000" cy="1000125"/>
           </a:xfrm>
           <a:prstGeom prst="roundRect">
             <a:avLst>
-              <a:gd name="adj" fmla="val 4347"/>
+              <a:gd name="adj" fmla="val 4761"/>
             </a:avLst>
           </a:prstGeom>
           <a:solidFill>
@@ -6308,7 +7116,7 @@
         </p:nvSpPr>
         <p:spPr>
           <a:xfrm>
-            <a:off x="1447800" y="6981825"/>
+            <a:off x="1447800" y="6653212"/>
             <a:ext cx="590550" cy="590550"/>
           </a:xfrm>
           <a:prstGeom prst="ellipse">
@@ -6338,7 +7146,7 @@
         </p:nvSpPr>
         <p:spPr>
           <a:xfrm>
-            <a:off x="1447800" y="7134225"/>
+            <a:off x="1447800" y="6805612"/>
             <a:ext cx="590550" cy="323850"/>
           </a:xfrm>
           <a:prstGeom prst="rect">
@@ -6379,8 +7187,8 @@
         </p:nvSpPr>
         <p:spPr>
           <a:xfrm>
-            <a:off x="2324100" y="6943725"/>
-            <a:ext cx="9906000" cy="400050"/>
+            <a:off x="2324100" y="6538912"/>
+            <a:ext cx="14478000" cy="400050"/>
           </a:xfrm>
           <a:prstGeom prst="rect">
             <a:avLst/>
@@ -6420,8 +7228,8 @@
         </p:nvSpPr>
         <p:spPr>
           <a:xfrm>
-            <a:off x="2324100" y="7343775"/>
-            <a:ext cx="9906000" cy="361950"/>
+            <a:off x="2324100" y="6996112"/>
+            <a:ext cx="14478000" cy="361950"/>
           </a:xfrm>
           <a:prstGeom prst="rect">
             <a:avLst/>
@@ -6448,34 +7256,30 @@
                 <a:ea typeface="Pretendard"/>
                 <a:cs typeface="Pretendard"/>
               </a:rPr>
-              <a:t>SHOW TABLES FROM iceberg.lakehouse → orders · daily_sales</a:t>
-            </a:r>
-          </a:p>
-        </p:txBody>
-      </p:sp>
-      <p:sp>
-        <p:nvSpPr>
-          <p:cNvPr id="28" name="Rounded Rectangle 27"/>
-          <p:cNvSpPr/>
-          <p:nvPr/>
-        </p:nvSpPr>
-        <p:spPr>
-          <a:xfrm>
-            <a:off x="13144500" y="2933700"/>
-            <a:ext cx="4000500" cy="4895850"/>
-          </a:xfrm>
-          <a:prstGeom prst="roundRect">
-            <a:avLst>
-              <a:gd name="adj" fmla="val 1190"/>
-            </a:avLst>
-          </a:prstGeom>
-          <a:solidFill>
-            <a:srgbClr val="EDF3FD"/>
-          </a:solidFill>
-          <a:ln w="9525">
-            <a:solidFill>
-              <a:srgbClr val="BFD3F5"/>
-            </a:solidFill>
+              <a:t>trino --execute "SHOW TABLES FROM iceberg.lakehouse;" → daily_sales · orders</a:t>
+            </a:r>
+          </a:p>
+        </p:txBody>
+      </p:sp>
+      <p:sp>
+        <p:nvSpPr>
+          <p:cNvPr id="28" name="Rectangle 27"/>
+          <p:cNvSpPr/>
+          <p:nvPr/>
+        </p:nvSpPr>
+        <p:spPr>
+          <a:xfrm>
+            <a:off x="1143000" y="7581900"/>
+            <a:ext cx="38100" cy="323850"/>
+          </a:xfrm>
+          <a:prstGeom prst="rect">
+            <a:avLst/>
+          </a:prstGeom>
+          <a:solidFill>
+            <a:srgbClr val="BFD3F5"/>
+          </a:solidFill>
+          <a:ln>
+            <a:noFill/>
           </a:ln>
           <a:effectLst/>
         </p:spPr>
@@ -6495,8 +7299,8 @@
         </p:nvSpPr>
         <p:spPr>
           <a:xfrm>
-            <a:off x="13487400" y="4562475"/>
-            <a:ext cx="3314700" cy="304800"/>
+            <a:off x="1314450" y="7581900"/>
+            <a:ext cx="15830550" cy="342900"/>
           </a:xfrm>
           <a:prstGeom prst="rect">
             <a:avLst/>
@@ -6515,29 +7319,59 @@
               </a:lnSpc>
             </a:pPr>
             <a:r>
-              <a:rPr sz="1800" b="1" spc="190">
-                <a:solidFill>
-                  <a:srgbClr val="1E5BC6"/>
-                </a:solidFill>
-                <a:latin typeface="Pretendard"/>
-                <a:ea typeface="Pretendard"/>
-                <a:cs typeface="Pretendard"/>
-              </a:rPr>
-              <a:t>준비 끝 기준</a:t>
-            </a:r>
-          </a:p>
-        </p:txBody>
-      </p:sp>
-      <p:sp>
-        <p:nvSpPr>
-          <p:cNvPr id="30" name="TextBox 29"/>
+              <a:rPr sz="1725" b="1">
+                <a:solidFill>
+                  <a:srgbClr val="7D7D7D"/>
+                </a:solidFill>
+                <a:latin typeface="Pretendard"/>
+                <a:ea typeface="Pretendard"/>
+                <a:cs typeface="Pretendard"/>
+              </a:rPr>
+              <a:t>Trino 는 "6" 처럼 따옴표가 붙어 나옵니다 · 수업 뒤엔 docker compose stop 까지만(메모리 2GB+ · trino 1.03GiB · spark-iceberg 1.15GiB)</a:t>
+            </a:r>
+          </a:p>
+        </p:txBody>
+      </p:sp>
+      <p:sp>
+        <p:nvSpPr>
+          <p:cNvPr id="30" name="Rectangle 29"/>
+          <p:cNvSpPr/>
+          <p:nvPr/>
+        </p:nvSpPr>
+        <p:spPr>
+          <a:xfrm>
+            <a:off x="1143000" y="8058150"/>
+            <a:ext cx="16002000" cy="9525"/>
+          </a:xfrm>
+          <a:prstGeom prst="rect">
+            <a:avLst/>
+          </a:prstGeom>
+          <a:solidFill>
+            <a:srgbClr val="DCE1E8"/>
+          </a:solidFill>
+          <a:ln>
+            <a:noFill/>
+          </a:ln>
+          <a:effectLst/>
+        </p:spPr>
+        <p:txBody>
+          <a:bodyPr rtlCol="0" anchor="ctr" wrap="square"/>
+          <a:lstStyle/>
+          <a:p>
+            <a:pPr algn="ctr"/>
+          </a:p>
+        </p:txBody>
+      </p:sp>
+      <p:sp>
+        <p:nvSpPr>
+          <p:cNvPr id="31" name="TextBox 30"/>
           <p:cNvSpPr txBox="1"/>
           <p:nvPr/>
         </p:nvSpPr>
         <p:spPr>
           <a:xfrm>
-            <a:off x="13487400" y="4962525"/>
-            <a:ext cx="3314700" cy="1238250"/>
+            <a:off x="1143000" y="8248650"/>
+            <a:ext cx="13335000" cy="323850"/>
           </a:xfrm>
           <a:prstGeom prst="rect">
             <a:avLst/>
@@ -6552,115 +7386,26 @@
           <a:p>
             <a:pPr algn="l">
               <a:lnSpc>
-                <a:spcPct val="138000"/>
-              </a:lnSpc>
-            </a:pPr>
-            <a:r>
-              <a:rPr sz="2700" b="1">
-                <a:solidFill>
-                  <a:srgbClr val="0D2B5E"/>
-                </a:solidFill>
-                <a:latin typeface="Pretendard"/>
-                <a:ea typeface="Pretendard"/>
-                <a:cs typeface="Pretendard"/>
-              </a:rPr>
-              <a:t>5개 Up</a:t>
-            </a:r>
-          </a:p>
-          <a:p>
-            <a:pPr algn="l">
-              <a:lnSpc>
-                <a:spcPct val="138000"/>
-              </a:lnSpc>
-            </a:pPr>
-            <a:r>
-              <a:rPr sz="2700" b="1">
-                <a:solidFill>
-                  <a:srgbClr val="0D2B5E"/>
-                </a:solidFill>
-                <a:latin typeface="Pretendard"/>
-                <a:ea typeface="Pretendard"/>
-                <a:cs typeface="Pretendard"/>
-              </a:rPr>
-              <a:t>count 6·6</a:t>
-            </a:r>
-          </a:p>
-        </p:txBody>
-      </p:sp>
-      <p:sp>
-        <p:nvSpPr>
-          <p:cNvPr id="31" name="Rectangle 30"/>
-          <p:cNvSpPr/>
-          <p:nvPr/>
-        </p:nvSpPr>
-        <p:spPr>
-          <a:xfrm>
-            <a:off x="1143000" y="8058150"/>
-            <a:ext cx="16002000" cy="9525"/>
-          </a:xfrm>
-          <a:prstGeom prst="rect">
-            <a:avLst/>
-          </a:prstGeom>
-          <a:solidFill>
-            <a:srgbClr val="DCE1E8"/>
-          </a:solidFill>
-          <a:ln>
-            <a:noFill/>
-          </a:ln>
-          <a:effectLst/>
-        </p:spPr>
-        <p:txBody>
-          <a:bodyPr rtlCol="0" anchor="ctr" wrap="square"/>
-          <a:lstStyle/>
-          <a:p>
-            <a:pPr algn="ctr"/>
+                <a:spcPct val="100000"/>
+              </a:lnSpc>
+            </a:pPr>
+            <a:r>
+              <a:rPr sz="1725" b="0">
+                <a:solidFill>
+                  <a:srgbClr val="7D7D7D"/>
+                </a:solidFill>
+                <a:latin typeface="Pretendard"/>
+                <a:ea typeface="Pretendard"/>
+                <a:cs typeface="Pretendard"/>
+              </a:rPr>
+              <a:t>데이터 엔지니어링 &amp; RAG 파이프라인 160H · 4-4 · 정리·회고 0.5H</a:t>
+            </a:r>
           </a:p>
         </p:txBody>
       </p:sp>
       <p:sp>
         <p:nvSpPr>
           <p:cNvPr id="32" name="TextBox 31"/>
-          <p:cNvSpPr txBox="1"/>
-          <p:nvPr/>
-        </p:nvSpPr>
-        <p:spPr>
-          <a:xfrm>
-            <a:off x="1143000" y="8248650"/>
-            <a:ext cx="13335000" cy="323850"/>
-          </a:xfrm>
-          <a:prstGeom prst="rect">
-            <a:avLst/>
-          </a:prstGeom>
-          <a:noFill/>
-        </p:spPr>
-        <p:txBody>
-          <a:bodyPr wrap="square" lIns="0" rIns="0" tIns="0" bIns="0" anchor="t">
-            <a:spAutoFit/>
-          </a:bodyPr>
-          <a:lstStyle/>
-          <a:p>
-            <a:pPr algn="l">
-              <a:lnSpc>
-                <a:spcPct val="100000"/>
-              </a:lnSpc>
-            </a:pPr>
-            <a:r>
-              <a:rPr sz="1725" b="0">
-                <a:solidFill>
-                  <a:srgbClr val="7D7D7D"/>
-                </a:solidFill>
-                <a:latin typeface="Pretendard"/>
-                <a:ea typeface="Pretendard"/>
-                <a:cs typeface="Pretendard"/>
-              </a:rPr>
-              <a:t>데이터 엔지니어링 &amp; RAG 파이프라인 160H · 4-4 · 정리·회고 0.5H</a:t>
-            </a:r>
-          </a:p>
-        </p:txBody>
-      </p:sp>
-      <p:sp>
-        <p:nvSpPr>
-          <p:cNvPr id="33" name="TextBox 32"/>
           <p:cNvSpPr txBox="1"/>
           <p:nvPr/>
         </p:nvSpPr>
@@ -6719,7 +7464,7 @@
       <p:grpSpPr/>
       <p:sp>
         <p:nvSpPr>
-          <p:cNvPr id="2" name="Oval 1"/>
+          <p:cNvPr id="2" name="deckgen:decor"/>
           <p:cNvSpPr/>
           <p:nvPr/>
         </p:nvSpPr>
@@ -6749,7 +7494,7 @@
       </p:sp>
       <p:sp>
         <p:nvSpPr>
-          <p:cNvPr id="3" name="Oval 2"/>
+          <p:cNvPr id="3" name="deckgen:decor"/>
           <p:cNvSpPr/>
           <p:nvPr/>
         </p:nvSpPr>
@@ -6779,7 +7524,7 @@
       </p:sp>
       <p:sp>
         <p:nvSpPr>
-          <p:cNvPr id="4" name="Oval 3"/>
+          <p:cNvPr id="4" name="deckgen:decor"/>
           <p:cNvSpPr/>
           <p:nvPr/>
         </p:nvSpPr>
@@ -7352,7 +8097,7 @@
                 <a:ea typeface="Pretendard"/>
                 <a:cs typeface="Pretendard"/>
               </a:rPr>
-              <a:t>iceberg.properties 의 각 설정 줄이 무엇을 뜻하는지 설명할 수 있다</a:t>
+              <a:t>iceberg.properties 각 줄의 뜻과 줄 끝 주석이 안 되는 이유를 안다</a:t>
             </a:r>
           </a:p>
         </p:txBody>
@@ -7936,7 +8681,7 @@
                 <a:ea typeface="Pretendard"/>
                 <a:cs typeface="Pretendard"/>
               </a:rPr>
-              <a:t>"orders$snapshots" 조회와 FOR VERSION AS OF 에 성공했다</a:t>
+              <a:t>"orders$snapshots"·FOR VERSION AS OF 와 Spark 문법 차이를 정리했다</a:t>
             </a:r>
           </a:p>
         </p:txBody>
@@ -8219,7 +8964,7 @@
       <p:grpSpPr/>
       <p:sp>
         <p:nvSpPr>
-          <p:cNvPr id="2" name="Oval 1"/>
+          <p:cNvPr id="2" name="deckgen:decor"/>
           <p:cNvSpPr/>
           <p:nvPr/>
         </p:nvSpPr>
@@ -8249,7 +8994,7 @@
       </p:sp>
       <p:sp>
         <p:nvSpPr>
-          <p:cNvPr id="3" name="Oval 2"/>
+          <p:cNvPr id="3" name="deckgen:decor"/>
           <p:cNvSpPr/>
           <p:nvPr/>
         </p:nvSpPr>
@@ -8279,7 +9024,7 @@
       </p:sp>
       <p:sp>
         <p:nvSpPr>
-          <p:cNvPr id="4" name="Oval 3"/>
+          <p:cNvPr id="4" name="deckgen:decor"/>
           <p:cNvSpPr/>
           <p:nvPr/>
         </p:nvSpPr>
@@ -8343,7 +9088,7 @@
                 <a:ea typeface="Pretendard"/>
                 <a:cs typeface="Pretendard"/>
               </a:rPr>
-              <a:t>자주 겪는 오류</a:t>
+              <a:t>자주 겪는 오류 ① 카탈로그 파일</a:t>
             </a:r>
           </a:p>
         </p:txBody>
@@ -8384,7 +9129,7 @@
                 <a:ea typeface="Pretendard"/>
                 <a:cs typeface="Pretendard"/>
               </a:rPr>
-              <a:t>증상으로 찾는 원인과 해결</a:t>
+              <a:t>iceberg.properties 에서 생기는 것</a:t>
             </a:r>
           </a:p>
         </p:txBody>
@@ -8981,7 +9726,25 @@
                 <a:ea typeface="Pretendard"/>
                 <a:cs typeface="Pretendard"/>
               </a:rPr>
-              <a:t>8080 포트 충돌</a:t>
+              <a:t>설정값에 # 뒤까지</a:t>
+            </a:r>
+          </a:p>
+          <a:p>
+            <a:pPr algn="l">
+              <a:lnSpc>
+                <a:spcPct val="115000"/>
+              </a:lnSpc>
+            </a:pPr>
+            <a:r>
+              <a:rPr sz="1875" b="1">
+                <a:solidFill>
+                  <a:srgbClr val="0D2B5E"/>
+                </a:solidFill>
+                <a:latin typeface="Pretendard"/>
+                <a:ea typeface="Pretendard"/>
+                <a:cs typeface="Pretendard"/>
+              </a:rPr>
+              <a:t>붙어 읽힘</a:t>
             </a:r>
           </a:p>
         </p:txBody>
@@ -9056,7 +9819,7 @@
                 <a:ea typeface="Pretendard"/>
                 <a:cs typeface="Pretendard"/>
               </a:rPr>
-              <a:t>다른 개발 서버가</a:t>
+              <a:t>줄 끝에 주석을 붙임</a:t>
             </a:r>
           </a:p>
           <a:p>
@@ -9074,7 +9837,7 @@
                 <a:ea typeface="Pretendard"/>
                 <a:cs typeface="Pretendard"/>
               </a:rPr>
-              <a:t>8080 사용</a:t>
+              <a:t>(값 = 주석까지)</a:t>
             </a:r>
           </a:p>
         </p:txBody>
@@ -9149,7 +9912,7 @@
                 <a:ea typeface="Pretendard"/>
                 <a:cs typeface="Pretendard"/>
               </a:rPr>
-              <a:t>"8081:8080" 매핑</a:t>
+              <a:t>주석은 따로 한 줄</a:t>
             </a:r>
           </a:p>
           <a:p>
@@ -9167,7 +9930,7 @@
                 <a:ea typeface="Pretendard"/>
                 <a:cs typeface="Pretendard"/>
               </a:rPr>
-              <a:t>UI 는 localhost:8081</a:t>
+              <a:t>값 뒤엔 붙이지 않기</a:t>
             </a:r>
           </a:p>
         </p:txBody>
@@ -9242,7 +10005,7 @@
                 <a:ea typeface="Pretendard"/>
                 <a:cs typeface="Pretendard"/>
               </a:rPr>
-              <a:t>S3 접근 오류</a:t>
+              <a:t>로그에 has been</a:t>
             </a:r>
           </a:p>
           <a:p>
@@ -9260,7 +10023,7 @@
                 <a:ea typeface="Pretendard"/>
                 <a:cs typeface="Pretendard"/>
               </a:rPr>
-              <a:t>Unable to execute…</a:t>
+              <a:t>replaced 경고</a:t>
             </a:r>
           </a:p>
         </p:txBody>
@@ -9335,7 +10098,7 @@
                 <a:ea typeface="Pretendard"/>
                 <a:cs typeface="Pretendard"/>
               </a:rPr>
-              <a:t>endpoint 가 localhost</a:t>
+              <a:t>옛 이름</a:t>
             </a:r>
           </a:p>
           <a:p>
@@ -9353,7 +10116,7 @@
                 <a:ea typeface="Pretendard"/>
                 <a:cs typeface="Pretendard"/>
               </a:rPr>
-              <a:t>path-style 빠짐</a:t>
+              <a:t>fs.native-s3.enabled</a:t>
             </a:r>
           </a:p>
         </p:txBody>
@@ -9428,7 +10191,7 @@
                 <a:ea typeface="Pretendard"/>
                 <a:cs typeface="Pretendard"/>
               </a:rPr>
-              <a:t>http://minio:9000</a:t>
+              <a:t>fs.s3.enabled=true</a:t>
             </a:r>
           </a:p>
           <a:p>
@@ -9446,275 +10209,14 @@
                 <a:ea typeface="Pretendard"/>
                 <a:cs typeface="Pretendard"/>
               </a:rPr>
-              <a:t>path-style-access=true</a:t>
-            </a:r>
-          </a:p>
-        </p:txBody>
-      </p:sp>
-      <p:sp>
-        <p:nvSpPr>
-          <p:cNvPr id="32" name="Rounded Rectangle 31"/>
-          <p:cNvSpPr/>
-          <p:nvPr/>
-        </p:nvSpPr>
-        <p:spPr>
-          <a:xfrm>
-            <a:off x="1143000" y="5619750"/>
-            <a:ext cx="4762500" cy="647700"/>
-          </a:xfrm>
-          <a:prstGeom prst="roundRect">
-            <a:avLst>
-              <a:gd name="adj" fmla="val 5882"/>
-            </a:avLst>
-          </a:prstGeom>
-          <a:solidFill>
-            <a:srgbClr val="EDF3FD"/>
-          </a:solidFill>
-          <a:ln w="9525">
-            <a:solidFill>
-              <a:srgbClr val="BFD3F5"/>
-            </a:solidFill>
-          </a:ln>
-          <a:effectLst/>
-        </p:spPr>
-        <p:txBody>
-          <a:bodyPr rtlCol="0" anchor="ctr" wrap="square"/>
-          <a:lstStyle/>
-          <a:p>
-            <a:pPr algn="ctr"/>
-          </a:p>
-        </p:txBody>
-      </p:sp>
-      <p:sp>
-        <p:nvSpPr>
-          <p:cNvPr id="33" name="TextBox 32"/>
-          <p:cNvSpPr txBox="1"/>
-          <p:nvPr/>
-        </p:nvSpPr>
-        <p:spPr>
-          <a:xfrm>
-            <a:off x="1238250" y="5619750"/>
-            <a:ext cx="4572000" cy="647700"/>
-          </a:xfrm>
-          <a:prstGeom prst="rect">
-            <a:avLst/>
-          </a:prstGeom>
-          <a:noFill/>
-        </p:spPr>
-        <p:txBody>
-          <a:bodyPr wrap="square" lIns="0" rIns="0" tIns="0" bIns="0" anchor="ctr">
-            <a:spAutoFit/>
-          </a:bodyPr>
-          <a:lstStyle/>
-          <a:p>
-            <a:pPr algn="l">
-              <a:lnSpc>
-                <a:spcPct val="115000"/>
-              </a:lnSpc>
-            </a:pPr>
-            <a:r>
-              <a:rPr sz="1875" b="1">
-                <a:solidFill>
-                  <a:srgbClr val="0D2B5E"/>
-                </a:solidFill>
-                <a:latin typeface="Pretendard"/>
-                <a:ea typeface="Pretendard"/>
-                <a:cs typeface="Pretendard"/>
-              </a:rPr>
-              <a:t>두 엔진 행 수 다름</a:t>
-            </a:r>
-          </a:p>
-        </p:txBody>
-      </p:sp>
-      <p:sp>
-        <p:nvSpPr>
-          <p:cNvPr id="34" name="Rounded Rectangle 33"/>
-          <p:cNvSpPr/>
-          <p:nvPr/>
-        </p:nvSpPr>
-        <p:spPr>
-          <a:xfrm>
-            <a:off x="5943600" y="5619750"/>
-            <a:ext cx="5242560" cy="647700"/>
-          </a:xfrm>
-          <a:prstGeom prst="roundRect">
-            <a:avLst>
-              <a:gd name="adj" fmla="val 5882"/>
-            </a:avLst>
-          </a:prstGeom>
-          <a:solidFill>
-            <a:srgbClr val="FAFBFD"/>
-          </a:solidFill>
-          <a:ln w="9525">
-            <a:solidFill>
-              <a:srgbClr val="DCE1E8"/>
-            </a:solidFill>
-          </a:ln>
-          <a:effectLst/>
-        </p:spPr>
-        <p:txBody>
-          <a:bodyPr rtlCol="0" anchor="ctr" wrap="square"/>
-          <a:lstStyle/>
-          <a:p>
-            <a:pPr algn="ctr"/>
-          </a:p>
-        </p:txBody>
-      </p:sp>
-      <p:sp>
-        <p:nvSpPr>
-          <p:cNvPr id="35" name="TextBox 34"/>
-          <p:cNvSpPr txBox="1"/>
-          <p:nvPr/>
-        </p:nvSpPr>
-        <p:spPr>
-          <a:xfrm>
-            <a:off x="6038850" y="5619750"/>
-            <a:ext cx="5052060" cy="647700"/>
-          </a:xfrm>
-          <a:prstGeom prst="rect">
-            <a:avLst/>
-          </a:prstGeom>
-          <a:noFill/>
-        </p:spPr>
-        <p:txBody>
-          <a:bodyPr wrap="square" lIns="0" rIns="0" tIns="0" bIns="0" anchor="ctr">
-            <a:spAutoFit/>
-          </a:bodyPr>
-          <a:lstStyle/>
-          <a:p>
-            <a:pPr algn="ctr">
-              <a:lnSpc>
-                <a:spcPct val="115000"/>
-              </a:lnSpc>
-            </a:pPr>
-            <a:r>
-              <a:rPr sz="1875" b="0">
-                <a:solidFill>
-                  <a:srgbClr val="3D3D3D"/>
-                </a:solidFill>
-                <a:latin typeface="Pretendard"/>
-                <a:ea typeface="Pretendard"/>
-                <a:cs typeface="Pretendard"/>
-              </a:rPr>
-              <a:t>다른 카탈로그·</a:t>
-            </a:r>
-          </a:p>
-          <a:p>
-            <a:pPr algn="ctr">
-              <a:lnSpc>
-                <a:spcPct val="115000"/>
-              </a:lnSpc>
-            </a:pPr>
-            <a:r>
-              <a:rPr sz="1875" b="0">
-                <a:solidFill>
-                  <a:srgbClr val="3D3D3D"/>
-                </a:solidFill>
-                <a:latin typeface="Pretendard"/>
-                <a:ea typeface="Pretendard"/>
-                <a:cs typeface="Pretendard"/>
-              </a:rPr>
-              <a:t>다른 warehouse</a:t>
-            </a:r>
-          </a:p>
-        </p:txBody>
-      </p:sp>
-      <p:sp>
-        <p:nvSpPr>
-          <p:cNvPr id="36" name="Rounded Rectangle 35"/>
-          <p:cNvSpPr/>
-          <p:nvPr/>
-        </p:nvSpPr>
-        <p:spPr>
-          <a:xfrm>
-            <a:off x="11224260" y="5619750"/>
-            <a:ext cx="5920740" cy="647700"/>
-          </a:xfrm>
-          <a:prstGeom prst="roundRect">
-            <a:avLst>
-              <a:gd name="adj" fmla="val 5882"/>
-            </a:avLst>
-          </a:prstGeom>
-          <a:solidFill>
-            <a:srgbClr val="FAFBFD"/>
-          </a:solidFill>
-          <a:ln w="9525">
-            <a:solidFill>
-              <a:srgbClr val="DCE1E8"/>
-            </a:solidFill>
-          </a:ln>
-          <a:effectLst/>
-        </p:spPr>
-        <p:txBody>
-          <a:bodyPr rtlCol="0" anchor="ctr" wrap="square"/>
-          <a:lstStyle/>
-          <a:p>
-            <a:pPr algn="ctr"/>
-          </a:p>
-        </p:txBody>
-      </p:sp>
-      <p:sp>
-        <p:nvSpPr>
-          <p:cNvPr id="37" name="TextBox 36"/>
-          <p:cNvSpPr txBox="1"/>
-          <p:nvPr/>
-        </p:nvSpPr>
-        <p:spPr>
-          <a:xfrm>
-            <a:off x="11319510" y="5619750"/>
-            <a:ext cx="5730240" cy="647700"/>
-          </a:xfrm>
-          <a:prstGeom prst="rect">
-            <a:avLst/>
-          </a:prstGeom>
-          <a:noFill/>
-        </p:spPr>
-        <p:txBody>
-          <a:bodyPr wrap="square" lIns="0" rIns="0" tIns="0" bIns="0" anchor="ctr">
-            <a:spAutoFit/>
-          </a:bodyPr>
-          <a:lstStyle/>
-          <a:p>
-            <a:pPr algn="ctr">
-              <a:lnSpc>
-                <a:spcPct val="115000"/>
-              </a:lnSpc>
-            </a:pPr>
-            <a:r>
-              <a:rPr sz="1875" b="0">
-                <a:solidFill>
-                  <a:srgbClr val="3D3D3D"/>
-                </a:solidFill>
-                <a:latin typeface="Pretendard"/>
-                <a:ea typeface="Pretendard"/>
-                <a:cs typeface="Pretendard"/>
-              </a:rPr>
-              <a:t>rest:8181 과</a:t>
-            </a:r>
-          </a:p>
-          <a:p>
-            <a:pPr algn="ctr">
-              <a:lnSpc>
-                <a:spcPct val="115000"/>
-              </a:lnSpc>
-            </a:pPr>
-            <a:r>
-              <a:rPr sz="1875" b="0">
-                <a:solidFill>
-                  <a:srgbClr val="3D3D3D"/>
-                </a:solidFill>
-                <a:latin typeface="Pretendard"/>
-                <a:ea typeface="Pretendard"/>
-                <a:cs typeface="Pretendard"/>
-              </a:rPr>
-              <a:t>s3://warehouse/ 대조</a:t>
-            </a:r>
-          </a:p>
-        </p:txBody>
-      </p:sp>
-      <p:sp>
-        <p:nvSpPr>
-          <p:cNvPr id="38" name="TextBox 37"/>
+              <a:t>(483 의 이름)</a:t>
+            </a:r>
+          </a:p>
+        </p:txBody>
+      </p:sp>
+      <p:sp>
+        <p:nvSpPr>
+          <p:cNvPr id="32" name="TextBox 31"/>
           <p:cNvSpPr txBox="1"/>
           <p:nvPr/>
         </p:nvSpPr>
@@ -9748,14 +10250,14 @@
                 <a:ea typeface="Pretendard"/>
                 <a:cs typeface="Pretendard"/>
               </a:rPr>
-              <a:t>8081 로 바꿔도 컨테이너 안 CLI(docker compose exec trino trino)는 내부 8080 이라 그대로 동작</a:t>
-            </a:r>
-          </a:p>
-        </p:txBody>
-      </p:sp>
-      <p:sp>
-        <p:nvSpPr>
-          <p:cNvPr id="39" name="Rectangle 38"/>
+              <a:t>파일을 고친 뒤에는 docker compose restart trino 로 다시 읽힙니다</a:t>
+            </a:r>
+          </a:p>
+        </p:txBody>
+      </p:sp>
+      <p:sp>
+        <p:nvSpPr>
+          <p:cNvPr id="33" name="Rectangle 32"/>
           <p:cNvSpPr/>
           <p:nvPr/>
         </p:nvSpPr>
@@ -9785,7 +10287,7 @@
       </p:sp>
       <p:sp>
         <p:nvSpPr>
-          <p:cNvPr id="40" name="TextBox 39"/>
+          <p:cNvPr id="34" name="TextBox 33"/>
           <p:cNvSpPr txBox="1"/>
           <p:nvPr/>
         </p:nvSpPr>
@@ -9826,7 +10328,7 @@
       </p:sp>
       <p:sp>
         <p:nvSpPr>
-          <p:cNvPr id="41" name="TextBox 40"/>
+          <p:cNvPr id="35" name="TextBox 34"/>
           <p:cNvSpPr txBox="1"/>
           <p:nvPr/>
         </p:nvSpPr>
@@ -9885,7 +10387,7 @@
       <p:grpSpPr/>
       <p:sp>
         <p:nvSpPr>
-          <p:cNvPr id="2" name="Oval 1"/>
+          <p:cNvPr id="2" name="deckgen:decor"/>
           <p:cNvSpPr/>
           <p:nvPr/>
         </p:nvSpPr>
@@ -9915,7 +10417,7 @@
       </p:sp>
       <p:sp>
         <p:nvSpPr>
-          <p:cNvPr id="3" name="Oval 2"/>
+          <p:cNvPr id="3" name="deckgen:decor"/>
           <p:cNvSpPr/>
           <p:nvPr/>
         </p:nvSpPr>
@@ -9945,7 +10447,7 @@
       </p:sp>
       <p:sp>
         <p:nvSpPr>
-          <p:cNvPr id="4" name="Oval 3"/>
+          <p:cNvPr id="4" name="deckgen:decor"/>
           <p:cNvSpPr/>
           <p:nvPr/>
         </p:nvSpPr>
@@ -10009,7 +10511,7 @@
                 <a:ea typeface="Pretendard"/>
                 <a:cs typeface="Pretendard"/>
               </a:rPr>
-              <a:t>예상 질문</a:t>
+              <a:t>자주 겪는 오류 ② 포트·주소</a:t>
             </a:r>
           </a:p>
         </p:txBody>
@@ -10050,7 +10552,7 @@
                 <a:ea typeface="Pretendard"/>
                 <a:cs typeface="Pretendard"/>
               </a:rPr>
-              <a:t>자주 나오는 질문 네 가지</a:t>
+              <a:t>연결에서 생기는 것</a:t>
             </a:r>
           </a:p>
         </p:txBody>
@@ -10087,18 +10589,324 @@
       </p:sp>
       <p:sp>
         <p:nvSpPr>
-          <p:cNvPr id="8" name="Rounded Rectangle 7"/>
-          <p:cNvSpPr/>
-          <p:nvPr/>
-        </p:nvSpPr>
-        <p:spPr>
-          <a:xfrm>
-            <a:off x="1143000" y="3352800"/>
-            <a:ext cx="16002000" cy="914400"/>
+          <p:cNvPr id="8" name="Rectangle 7"/>
+          <p:cNvSpPr/>
+          <p:nvPr/>
+        </p:nvSpPr>
+        <p:spPr>
+          <a:xfrm>
+            <a:off x="1143000" y="2781300"/>
+            <a:ext cx="4762500" cy="590550"/>
+          </a:xfrm>
+          <a:prstGeom prst="rect">
+            <a:avLst/>
+          </a:prstGeom>
+          <a:solidFill>
+            <a:srgbClr val="0D2B5E"/>
+          </a:solidFill>
+          <a:ln>
+            <a:noFill/>
+          </a:ln>
+          <a:effectLst/>
+        </p:spPr>
+        <p:txBody>
+          <a:bodyPr rtlCol="0" anchor="ctr" wrap="square"/>
+          <a:lstStyle/>
+          <a:p>
+            <a:pPr algn="ctr"/>
+          </a:p>
+        </p:txBody>
+      </p:sp>
+      <p:sp>
+        <p:nvSpPr>
+          <p:cNvPr id="9" name="TextBox 8"/>
+          <p:cNvSpPr txBox="1"/>
+          <p:nvPr/>
+        </p:nvSpPr>
+        <p:spPr>
+          <a:xfrm>
+            <a:off x="1143000" y="2781300"/>
+            <a:ext cx="4762500" cy="590550"/>
+          </a:xfrm>
+          <a:prstGeom prst="rect">
+            <a:avLst/>
+          </a:prstGeom>
+          <a:noFill/>
+        </p:spPr>
+        <p:txBody>
+          <a:bodyPr wrap="square" lIns="0" rIns="0" tIns="0" bIns="0" anchor="ctr">
+            <a:spAutoFit/>
+          </a:bodyPr>
+          <a:lstStyle/>
+          <a:p>
+            <a:pPr algn="ctr">
+              <a:lnSpc>
+                <a:spcPct val="100000"/>
+              </a:lnSpc>
+            </a:pPr>
+            <a:r>
+              <a:rPr sz="2025" b="1">
+                <a:solidFill>
+                  <a:srgbClr val="FFFFFF"/>
+                </a:solidFill>
+                <a:latin typeface="Pretendard"/>
+                <a:ea typeface="Pretendard"/>
+                <a:cs typeface="Pretendard"/>
+              </a:rPr>
+              <a:t>증상</a:t>
+            </a:r>
+          </a:p>
+        </p:txBody>
+      </p:sp>
+      <p:sp>
+        <p:nvSpPr>
+          <p:cNvPr id="10" name="Rectangle 9"/>
+          <p:cNvSpPr/>
+          <p:nvPr/>
+        </p:nvSpPr>
+        <p:spPr>
+          <a:xfrm>
+            <a:off x="5943600" y="2781300"/>
+            <a:ext cx="5242560" cy="590550"/>
+          </a:xfrm>
+          <a:prstGeom prst="rect">
+            <a:avLst/>
+          </a:prstGeom>
+          <a:solidFill>
+            <a:srgbClr val="1E5BC6"/>
+          </a:solidFill>
+          <a:ln>
+            <a:noFill/>
+          </a:ln>
+          <a:effectLst/>
+        </p:spPr>
+        <p:txBody>
+          <a:bodyPr rtlCol="0" anchor="ctr" wrap="square"/>
+          <a:lstStyle/>
+          <a:p>
+            <a:pPr algn="ctr"/>
+          </a:p>
+        </p:txBody>
+      </p:sp>
+      <p:sp>
+        <p:nvSpPr>
+          <p:cNvPr id="11" name="TextBox 10"/>
+          <p:cNvSpPr txBox="1"/>
+          <p:nvPr/>
+        </p:nvSpPr>
+        <p:spPr>
+          <a:xfrm>
+            <a:off x="5943600" y="2781300"/>
+            <a:ext cx="5242560" cy="590550"/>
+          </a:xfrm>
+          <a:prstGeom prst="rect">
+            <a:avLst/>
+          </a:prstGeom>
+          <a:noFill/>
+        </p:spPr>
+        <p:txBody>
+          <a:bodyPr wrap="square" lIns="0" rIns="0" tIns="0" bIns="0" anchor="ctr">
+            <a:spAutoFit/>
+          </a:bodyPr>
+          <a:lstStyle/>
+          <a:p>
+            <a:pPr algn="ctr">
+              <a:lnSpc>
+                <a:spcPct val="100000"/>
+              </a:lnSpc>
+            </a:pPr>
+            <a:r>
+              <a:rPr sz="2025" b="1">
+                <a:solidFill>
+                  <a:srgbClr val="FFFFFF"/>
+                </a:solidFill>
+                <a:latin typeface="Pretendard"/>
+                <a:ea typeface="Pretendard"/>
+                <a:cs typeface="Pretendard"/>
+              </a:rPr>
+              <a:t>원인</a:t>
+            </a:r>
+          </a:p>
+        </p:txBody>
+      </p:sp>
+      <p:sp>
+        <p:nvSpPr>
+          <p:cNvPr id="12" name="Rectangle 11"/>
+          <p:cNvSpPr/>
+          <p:nvPr/>
+        </p:nvSpPr>
+        <p:spPr>
+          <a:xfrm>
+            <a:off x="11224260" y="2781300"/>
+            <a:ext cx="5920740" cy="590550"/>
+          </a:xfrm>
+          <a:prstGeom prst="rect">
+            <a:avLst/>
+          </a:prstGeom>
+          <a:solidFill>
+            <a:srgbClr val="1E5BC6"/>
+          </a:solidFill>
+          <a:ln>
+            <a:noFill/>
+          </a:ln>
+          <a:effectLst/>
+        </p:spPr>
+        <p:txBody>
+          <a:bodyPr rtlCol="0" anchor="ctr" wrap="square"/>
+          <a:lstStyle/>
+          <a:p>
+            <a:pPr algn="ctr"/>
+          </a:p>
+        </p:txBody>
+      </p:sp>
+      <p:sp>
+        <p:nvSpPr>
+          <p:cNvPr id="13" name="TextBox 12"/>
+          <p:cNvSpPr txBox="1"/>
+          <p:nvPr/>
+        </p:nvSpPr>
+        <p:spPr>
+          <a:xfrm>
+            <a:off x="11224260" y="2781300"/>
+            <a:ext cx="5920740" cy="590550"/>
+          </a:xfrm>
+          <a:prstGeom prst="rect">
+            <a:avLst/>
+          </a:prstGeom>
+          <a:noFill/>
+        </p:spPr>
+        <p:txBody>
+          <a:bodyPr wrap="square" lIns="0" rIns="0" tIns="0" bIns="0" anchor="ctr">
+            <a:spAutoFit/>
+          </a:bodyPr>
+          <a:lstStyle/>
+          <a:p>
+            <a:pPr algn="ctr">
+              <a:lnSpc>
+                <a:spcPct val="100000"/>
+              </a:lnSpc>
+            </a:pPr>
+            <a:r>
+              <a:rPr sz="2025" b="1">
+                <a:solidFill>
+                  <a:srgbClr val="FFFFFF"/>
+                </a:solidFill>
+                <a:latin typeface="Pretendard"/>
+                <a:ea typeface="Pretendard"/>
+                <a:cs typeface="Pretendard"/>
+              </a:rPr>
+              <a:t>해결</a:t>
+            </a:r>
+          </a:p>
+        </p:txBody>
+      </p:sp>
+      <p:sp>
+        <p:nvSpPr>
+          <p:cNvPr id="14" name="Rounded Rectangle 13"/>
+          <p:cNvSpPr/>
+          <p:nvPr/>
+        </p:nvSpPr>
+        <p:spPr>
+          <a:xfrm>
+            <a:off x="1143000" y="3448050"/>
+            <a:ext cx="4762500" cy="647700"/>
           </a:xfrm>
           <a:prstGeom prst="roundRect">
             <a:avLst>
-              <a:gd name="adj" fmla="val 5208"/>
+              <a:gd name="adj" fmla="val 5882"/>
+            </a:avLst>
+          </a:prstGeom>
+          <a:solidFill>
+            <a:srgbClr val="EDF3FD"/>
+          </a:solidFill>
+          <a:ln w="9525">
+            <a:solidFill>
+              <a:srgbClr val="BFD3F5"/>
+            </a:solidFill>
+          </a:ln>
+          <a:effectLst/>
+        </p:spPr>
+        <p:txBody>
+          <a:bodyPr rtlCol="0" anchor="ctr" wrap="square"/>
+          <a:lstStyle/>
+          <a:p>
+            <a:pPr algn="ctr"/>
+          </a:p>
+        </p:txBody>
+      </p:sp>
+      <p:sp>
+        <p:nvSpPr>
+          <p:cNvPr id="15" name="TextBox 14"/>
+          <p:cNvSpPr txBox="1"/>
+          <p:nvPr/>
+        </p:nvSpPr>
+        <p:spPr>
+          <a:xfrm>
+            <a:off x="1238250" y="3448050"/>
+            <a:ext cx="4572000" cy="647700"/>
+          </a:xfrm>
+          <a:prstGeom prst="rect">
+            <a:avLst/>
+          </a:prstGeom>
+          <a:noFill/>
+        </p:spPr>
+        <p:txBody>
+          <a:bodyPr wrap="square" lIns="0" rIns="0" tIns="0" bIns="0" anchor="ctr">
+            <a:spAutoFit/>
+          </a:bodyPr>
+          <a:lstStyle/>
+          <a:p>
+            <a:pPr algn="l">
+              <a:lnSpc>
+                <a:spcPct val="115000"/>
+              </a:lnSpc>
+            </a:pPr>
+            <a:r>
+              <a:rPr sz="1875" b="1">
+                <a:solidFill>
+                  <a:srgbClr val="0D2B5E"/>
+                </a:solidFill>
+                <a:latin typeface="Pretendard"/>
+                <a:ea typeface="Pretendard"/>
+                <a:cs typeface="Pretendard"/>
+              </a:rPr>
+              <a:t>8080 포트 충돌로</a:t>
+            </a:r>
+          </a:p>
+          <a:p>
+            <a:pPr algn="l">
+              <a:lnSpc>
+                <a:spcPct val="115000"/>
+              </a:lnSpc>
+            </a:pPr>
+            <a:r>
+              <a:rPr sz="1875" b="1">
+                <a:solidFill>
+                  <a:srgbClr val="0D2B5E"/>
+                </a:solidFill>
+                <a:latin typeface="Pretendard"/>
+                <a:ea typeface="Pretendard"/>
+                <a:cs typeface="Pretendard"/>
+              </a:rPr>
+              <a:t>trino 가 안 뜸</a:t>
+            </a:r>
+          </a:p>
+        </p:txBody>
+      </p:sp>
+      <p:sp>
+        <p:nvSpPr>
+          <p:cNvPr id="16" name="Rounded Rectangle 15"/>
+          <p:cNvSpPr/>
+          <p:nvPr/>
+        </p:nvSpPr>
+        <p:spPr>
+          <a:xfrm>
+            <a:off x="5943600" y="3448050"/>
+            <a:ext cx="5242560" cy="647700"/>
+          </a:xfrm>
+          <a:prstGeom prst="roundRect">
+            <a:avLst>
+              <a:gd name="adj" fmla="val 5882"/>
             </a:avLst>
           </a:prstGeom>
           <a:solidFill>
@@ -10121,115 +10929,14 @@
       </p:sp>
       <p:sp>
         <p:nvSpPr>
-          <p:cNvPr id="9" name="Rectangle 8"/>
-          <p:cNvSpPr/>
-          <p:nvPr/>
-        </p:nvSpPr>
-        <p:spPr>
-          <a:xfrm>
-            <a:off x="1143000" y="3352800"/>
-            <a:ext cx="47625" cy="914400"/>
-          </a:xfrm>
-          <a:prstGeom prst="rect">
-            <a:avLst/>
-          </a:prstGeom>
-          <a:solidFill>
-            <a:srgbClr val="1E5BC6"/>
-          </a:solidFill>
-          <a:ln>
-            <a:noFill/>
-          </a:ln>
-          <a:effectLst/>
-        </p:spPr>
-        <p:txBody>
-          <a:bodyPr rtlCol="0" anchor="ctr" wrap="square"/>
-          <a:lstStyle/>
-          <a:p>
-            <a:pPr algn="ctr"/>
-          </a:p>
-        </p:txBody>
-      </p:sp>
-      <p:sp>
-        <p:nvSpPr>
-          <p:cNvPr id="10" name="Oval 9"/>
-          <p:cNvSpPr/>
-          <p:nvPr/>
-        </p:nvSpPr>
-        <p:spPr>
-          <a:xfrm>
-            <a:off x="1428750" y="3600450"/>
-            <a:ext cx="419100" cy="419100"/>
-          </a:xfrm>
-          <a:prstGeom prst="ellipse">
-            <a:avLst/>
-          </a:prstGeom>
-          <a:solidFill>
-            <a:srgbClr val="0D2B5E"/>
-          </a:solidFill>
-          <a:ln>
-            <a:noFill/>
-          </a:ln>
-          <a:effectLst/>
-        </p:spPr>
-        <p:txBody>
-          <a:bodyPr rtlCol="0" anchor="ctr" wrap="square"/>
-          <a:lstStyle/>
-          <a:p>
-            <a:pPr algn="ctr"/>
-          </a:p>
-        </p:txBody>
-      </p:sp>
-      <p:sp>
-        <p:nvSpPr>
-          <p:cNvPr id="11" name="TextBox 10"/>
+          <p:cNvPr id="17" name="TextBox 16"/>
           <p:cNvSpPr txBox="1"/>
           <p:nvPr/>
         </p:nvSpPr>
         <p:spPr>
           <a:xfrm>
-            <a:off x="1428750" y="3667125"/>
-            <a:ext cx="419100" cy="304800"/>
-          </a:xfrm>
-          <a:prstGeom prst="rect">
-            <a:avLst/>
-          </a:prstGeom>
-          <a:noFill/>
-        </p:spPr>
-        <p:txBody>
-          <a:bodyPr wrap="square" lIns="0" rIns="0" tIns="0" bIns="0" anchor="t">
-            <a:spAutoFit/>
-          </a:bodyPr>
-          <a:lstStyle/>
-          <a:p>
-            <a:pPr algn="ctr">
-              <a:lnSpc>
-                <a:spcPct val="100000"/>
-              </a:lnSpc>
-            </a:pPr>
-            <a:r>
-              <a:rPr sz="1875" b="1">
-                <a:solidFill>
-                  <a:srgbClr val="FFFFFF"/>
-                </a:solidFill>
-                <a:latin typeface="Pretendard"/>
-                <a:ea typeface="Pretendard"/>
-                <a:cs typeface="Pretendard"/>
-              </a:rPr>
-              <a:t>1</a:t>
-            </a:r>
-          </a:p>
-        </p:txBody>
-      </p:sp>
-      <p:sp>
-        <p:nvSpPr>
-          <p:cNvPr id="12" name="TextBox 11"/>
-          <p:cNvSpPr txBox="1"/>
-          <p:nvPr/>
-        </p:nvSpPr>
-        <p:spPr>
-          <a:xfrm>
-            <a:off x="2057400" y="3448050"/>
-            <a:ext cx="14763750" cy="723900"/>
+            <a:off x="6038850" y="3448050"/>
+            <a:ext cx="5052060" cy="647700"/>
           </a:xfrm>
           <a:prstGeom prst="rect">
             <a:avLst/>
@@ -10242,31 +10949,10 @@
           </a:bodyPr>
           <a:lstStyle/>
           <a:p>
-            <a:pPr>
-              <a:lnSpc>
-                <a:spcPct val="120000"/>
-              </a:lnSpc>
-            </a:pPr>
-            <a:r>
-              <a:rPr sz="2175" b="1">
-                <a:solidFill>
-                  <a:srgbClr val="0D2B5E"/>
-                </a:solidFill>
-                <a:latin typeface="Pretendard"/>
-                <a:ea typeface="Pretendard"/>
-                <a:cs typeface="Pretendard"/>
-              </a:rPr>
-              <a:t>Trino 로 다 하면 안 되나요?</a:t>
-            </a:r>
-          </a:p>
-          <a:p>
-            <a:pPr>
-              <a:lnSpc>
-                <a:spcPct val="130000"/>
-              </a:lnSpc>
-              <a:spcBef>
-                <a:spcPts val="300"/>
-              </a:spcBef>
+            <a:pPr algn="ctr">
+              <a:lnSpc>
+                <a:spcPct val="115000"/>
+              </a:lnSpc>
             </a:pPr>
             <a:r>
               <a:rPr sz="1875" b="0">
@@ -10277,25 +10963,43 @@
                 <a:ea typeface="Pretendard"/>
                 <a:cs typeface="Pretendard"/>
               </a:rPr>
-              <a:t>대량 변환·MERGE 는 Spark — Trino 는 실패하면 처음부터 다시 하므로 몇 시간짜리엔 부적합</a:t>
-            </a:r>
-          </a:p>
-        </p:txBody>
-      </p:sp>
-      <p:sp>
-        <p:nvSpPr>
-          <p:cNvPr id="13" name="Rounded Rectangle 12"/>
-          <p:cNvSpPr/>
-          <p:nvPr/>
-        </p:nvSpPr>
-        <p:spPr>
-          <a:xfrm>
-            <a:off x="1143000" y="4400550"/>
-            <a:ext cx="16002000" cy="914400"/>
+              <a:t>다른 개발 서버가</a:t>
+            </a:r>
+          </a:p>
+          <a:p>
+            <a:pPr algn="ctr">
+              <a:lnSpc>
+                <a:spcPct val="115000"/>
+              </a:lnSpc>
+            </a:pPr>
+            <a:r>
+              <a:rPr sz="1875" b="0">
+                <a:solidFill>
+                  <a:srgbClr val="3D3D3D"/>
+                </a:solidFill>
+                <a:latin typeface="Pretendard"/>
+                <a:ea typeface="Pretendard"/>
+                <a:cs typeface="Pretendard"/>
+              </a:rPr>
+              <a:t>8080 사용</a:t>
+            </a:r>
+          </a:p>
+        </p:txBody>
+      </p:sp>
+      <p:sp>
+        <p:nvSpPr>
+          <p:cNvPr id="18" name="Rounded Rectangle 17"/>
+          <p:cNvSpPr/>
+          <p:nvPr/>
+        </p:nvSpPr>
+        <p:spPr>
+          <a:xfrm>
+            <a:off x="11224260" y="3448050"/>
+            <a:ext cx="5920740" cy="647700"/>
           </a:xfrm>
           <a:prstGeom prst="roundRect">
             <a:avLst>
-              <a:gd name="adj" fmla="val 5208"/>
+              <a:gd name="adj" fmla="val 5882"/>
             </a:avLst>
           </a:prstGeom>
           <a:solidFill>
@@ -10318,115 +11022,14 @@
       </p:sp>
       <p:sp>
         <p:nvSpPr>
-          <p:cNvPr id="14" name="Rectangle 13"/>
-          <p:cNvSpPr/>
-          <p:nvPr/>
-        </p:nvSpPr>
-        <p:spPr>
-          <a:xfrm>
-            <a:off x="1143000" y="4400550"/>
-            <a:ext cx="47625" cy="914400"/>
-          </a:xfrm>
-          <a:prstGeom prst="rect">
-            <a:avLst/>
-          </a:prstGeom>
-          <a:solidFill>
-            <a:srgbClr val="1E5BC6"/>
-          </a:solidFill>
-          <a:ln>
-            <a:noFill/>
-          </a:ln>
-          <a:effectLst/>
-        </p:spPr>
-        <p:txBody>
-          <a:bodyPr rtlCol="0" anchor="ctr" wrap="square"/>
-          <a:lstStyle/>
-          <a:p>
-            <a:pPr algn="ctr"/>
-          </a:p>
-        </p:txBody>
-      </p:sp>
-      <p:sp>
-        <p:nvSpPr>
-          <p:cNvPr id="15" name="Oval 14"/>
-          <p:cNvSpPr/>
-          <p:nvPr/>
-        </p:nvSpPr>
-        <p:spPr>
-          <a:xfrm>
-            <a:off x="1428750" y="4648200"/>
-            <a:ext cx="419100" cy="419100"/>
-          </a:xfrm>
-          <a:prstGeom prst="ellipse">
-            <a:avLst/>
-          </a:prstGeom>
-          <a:solidFill>
-            <a:srgbClr val="0D2B5E"/>
-          </a:solidFill>
-          <a:ln>
-            <a:noFill/>
-          </a:ln>
-          <a:effectLst/>
-        </p:spPr>
-        <p:txBody>
-          <a:bodyPr rtlCol="0" anchor="ctr" wrap="square"/>
-          <a:lstStyle/>
-          <a:p>
-            <a:pPr algn="ctr"/>
-          </a:p>
-        </p:txBody>
-      </p:sp>
-      <p:sp>
-        <p:nvSpPr>
-          <p:cNvPr id="16" name="TextBox 15"/>
+          <p:cNvPr id="19" name="TextBox 18"/>
           <p:cNvSpPr txBox="1"/>
           <p:nvPr/>
         </p:nvSpPr>
         <p:spPr>
           <a:xfrm>
-            <a:off x="1428750" y="4714875"/>
-            <a:ext cx="419100" cy="304800"/>
-          </a:xfrm>
-          <a:prstGeom prst="rect">
-            <a:avLst/>
-          </a:prstGeom>
-          <a:noFill/>
-        </p:spPr>
-        <p:txBody>
-          <a:bodyPr wrap="square" lIns="0" rIns="0" tIns="0" bIns="0" anchor="t">
-            <a:spAutoFit/>
-          </a:bodyPr>
-          <a:lstStyle/>
-          <a:p>
-            <a:pPr algn="ctr">
-              <a:lnSpc>
-                <a:spcPct val="100000"/>
-              </a:lnSpc>
-            </a:pPr>
-            <a:r>
-              <a:rPr sz="1875" b="1">
-                <a:solidFill>
-                  <a:srgbClr val="FFFFFF"/>
-                </a:solidFill>
-                <a:latin typeface="Pretendard"/>
-                <a:ea typeface="Pretendard"/>
-                <a:cs typeface="Pretendard"/>
-              </a:rPr>
-              <a:t>2</a:t>
-            </a:r>
-          </a:p>
-        </p:txBody>
-      </p:sp>
-      <p:sp>
-        <p:nvSpPr>
-          <p:cNvPr id="17" name="TextBox 16"/>
-          <p:cNvSpPr txBox="1"/>
-          <p:nvPr/>
-        </p:nvSpPr>
-        <p:spPr>
-          <a:xfrm>
-            <a:off x="2057400" y="4495800"/>
-            <a:ext cx="14763750" cy="723900"/>
+            <a:off x="11319510" y="3448050"/>
+            <a:ext cx="5730240" cy="647700"/>
           </a:xfrm>
           <a:prstGeom prst="rect">
             <a:avLst/>
@@ -10439,31 +11042,10 @@
           </a:bodyPr>
           <a:lstStyle/>
           <a:p>
-            <a:pPr>
-              <a:lnSpc>
-                <a:spcPct val="120000"/>
-              </a:lnSpc>
-            </a:pPr>
-            <a:r>
-              <a:rPr sz="2175" b="1">
-                <a:solidFill>
-                  <a:srgbClr val="0D2B5E"/>
-                </a:solidFill>
-                <a:latin typeface="Pretendard"/>
-                <a:ea typeface="Pretendard"/>
-                <a:cs typeface="Pretendard"/>
-              </a:rPr>
-              <a:t>여러 소스를 조인한다는 뜻은?</a:t>
-            </a:r>
-          </a:p>
-          <a:p>
-            <a:pPr>
-              <a:lnSpc>
-                <a:spcPct val="130000"/>
-              </a:lnSpc>
-              <a:spcBef>
-                <a:spcPts val="300"/>
-              </a:spcBef>
+            <a:pPr algn="ctr">
+              <a:lnSpc>
+                <a:spcPct val="115000"/>
+              </a:lnSpc>
             </a:pPr>
             <a:r>
               <a:rPr sz="1875" b="0">
@@ -10474,25 +11056,136 @@
                 <a:ea typeface="Pretendard"/>
                 <a:cs typeface="Pretendard"/>
               </a:rPr>
-              <a:t>mysql.properties 를 하나 더 두면 iceberg.lakehouse.orders 와 mysql.shop.customers 를 한 SQL 로</a:t>
-            </a:r>
-          </a:p>
-        </p:txBody>
-      </p:sp>
-      <p:sp>
-        <p:nvSpPr>
-          <p:cNvPr id="18" name="Rounded Rectangle 17"/>
-          <p:cNvSpPr/>
-          <p:nvPr/>
-        </p:nvSpPr>
-        <p:spPr>
-          <a:xfrm>
-            <a:off x="1143000" y="5448300"/>
-            <a:ext cx="16002000" cy="914400"/>
+              <a:t>"18080:8080" 매핑</a:t>
+            </a:r>
+          </a:p>
+          <a:p>
+            <a:pPr algn="ctr">
+              <a:lnSpc>
+                <a:spcPct val="115000"/>
+              </a:lnSpc>
+            </a:pPr>
+            <a:r>
+              <a:rPr sz="1875" b="0">
+                <a:solidFill>
+                  <a:srgbClr val="3D3D3D"/>
+                </a:solidFill>
+                <a:latin typeface="Pretendard"/>
+                <a:ea typeface="Pretendard"/>
+                <a:cs typeface="Pretendard"/>
+              </a:rPr>
+              <a:t>UI 는 localhost:18080</a:t>
+            </a:r>
+          </a:p>
+        </p:txBody>
+      </p:sp>
+      <p:sp>
+        <p:nvSpPr>
+          <p:cNvPr id="20" name="Rounded Rectangle 19"/>
+          <p:cNvSpPr/>
+          <p:nvPr/>
+        </p:nvSpPr>
+        <p:spPr>
+          <a:xfrm>
+            <a:off x="1143000" y="4171950"/>
+            <a:ext cx="4762500" cy="647700"/>
           </a:xfrm>
           <a:prstGeom prst="roundRect">
             <a:avLst>
-              <a:gd name="adj" fmla="val 5208"/>
+              <a:gd name="adj" fmla="val 5882"/>
+            </a:avLst>
+          </a:prstGeom>
+          <a:solidFill>
+            <a:srgbClr val="EDF3FD"/>
+          </a:solidFill>
+          <a:ln w="9525">
+            <a:solidFill>
+              <a:srgbClr val="BFD3F5"/>
+            </a:solidFill>
+          </a:ln>
+          <a:effectLst/>
+        </p:spPr>
+        <p:txBody>
+          <a:bodyPr rtlCol="0" anchor="ctr" wrap="square"/>
+          <a:lstStyle/>
+          <a:p>
+            <a:pPr algn="ctr"/>
+          </a:p>
+        </p:txBody>
+      </p:sp>
+      <p:sp>
+        <p:nvSpPr>
+          <p:cNvPr id="21" name="TextBox 20"/>
+          <p:cNvSpPr txBox="1"/>
+          <p:nvPr/>
+        </p:nvSpPr>
+        <p:spPr>
+          <a:xfrm>
+            <a:off x="1238250" y="4171950"/>
+            <a:ext cx="4572000" cy="647700"/>
+          </a:xfrm>
+          <a:prstGeom prst="rect">
+            <a:avLst/>
+          </a:prstGeom>
+          <a:noFill/>
+        </p:spPr>
+        <p:txBody>
+          <a:bodyPr wrap="square" lIns="0" rIns="0" tIns="0" bIns="0" anchor="ctr">
+            <a:spAutoFit/>
+          </a:bodyPr>
+          <a:lstStyle/>
+          <a:p>
+            <a:pPr algn="l">
+              <a:lnSpc>
+                <a:spcPct val="115000"/>
+              </a:lnSpc>
+            </a:pPr>
+            <a:r>
+              <a:rPr sz="1875" b="1">
+                <a:solidFill>
+                  <a:srgbClr val="0D2B5E"/>
+                </a:solidFill>
+                <a:latin typeface="Pretendard"/>
+                <a:ea typeface="Pretendard"/>
+                <a:cs typeface="Pretendard"/>
+              </a:rPr>
+              <a:t>SHOW TABLES 는 되고</a:t>
+            </a:r>
+          </a:p>
+          <a:p>
+            <a:pPr algn="l">
+              <a:lnSpc>
+                <a:spcPct val="115000"/>
+              </a:lnSpc>
+            </a:pPr>
+            <a:r>
+              <a:rPr sz="1875" b="1">
+                <a:solidFill>
+                  <a:srgbClr val="0D2B5E"/>
+                </a:solidFill>
+                <a:latin typeface="Pretendard"/>
+                <a:ea typeface="Pretendard"/>
+                <a:cs typeface="Pretendard"/>
+              </a:rPr>
+              <a:t>SELECT 가 136초 멈춤</a:t>
+            </a:r>
+          </a:p>
+        </p:txBody>
+      </p:sp>
+      <p:sp>
+        <p:nvSpPr>
+          <p:cNvPr id="22" name="Rounded Rectangle 21"/>
+          <p:cNvSpPr/>
+          <p:nvPr/>
+        </p:nvSpPr>
+        <p:spPr>
+          <a:xfrm>
+            <a:off x="5943600" y="4171950"/>
+            <a:ext cx="5242560" cy="647700"/>
+          </a:xfrm>
+          <a:prstGeom prst="roundRect">
+            <a:avLst>
+              <a:gd name="adj" fmla="val 5882"/>
             </a:avLst>
           </a:prstGeom>
           <a:solidFill>
@@ -10515,115 +11208,14 @@
       </p:sp>
       <p:sp>
         <p:nvSpPr>
-          <p:cNvPr id="19" name="Rectangle 18"/>
-          <p:cNvSpPr/>
-          <p:nvPr/>
-        </p:nvSpPr>
-        <p:spPr>
-          <a:xfrm>
-            <a:off x="1143000" y="5448300"/>
-            <a:ext cx="47625" cy="914400"/>
-          </a:xfrm>
-          <a:prstGeom prst="rect">
-            <a:avLst/>
-          </a:prstGeom>
-          <a:solidFill>
-            <a:srgbClr val="1E5BC6"/>
-          </a:solidFill>
-          <a:ln>
-            <a:noFill/>
-          </a:ln>
-          <a:effectLst/>
-        </p:spPr>
-        <p:txBody>
-          <a:bodyPr rtlCol="0" anchor="ctr" wrap="square"/>
-          <a:lstStyle/>
-          <a:p>
-            <a:pPr algn="ctr"/>
-          </a:p>
-        </p:txBody>
-      </p:sp>
-      <p:sp>
-        <p:nvSpPr>
-          <p:cNvPr id="20" name="Oval 19"/>
-          <p:cNvSpPr/>
-          <p:nvPr/>
-        </p:nvSpPr>
-        <p:spPr>
-          <a:xfrm>
-            <a:off x="1428750" y="5695950"/>
-            <a:ext cx="419100" cy="419100"/>
-          </a:xfrm>
-          <a:prstGeom prst="ellipse">
-            <a:avLst/>
-          </a:prstGeom>
-          <a:solidFill>
-            <a:srgbClr val="0D2B5E"/>
-          </a:solidFill>
-          <a:ln>
-            <a:noFill/>
-          </a:ln>
-          <a:effectLst/>
-        </p:spPr>
-        <p:txBody>
-          <a:bodyPr rtlCol="0" anchor="ctr" wrap="square"/>
-          <a:lstStyle/>
-          <a:p>
-            <a:pPr algn="ctr"/>
-          </a:p>
-        </p:txBody>
-      </p:sp>
-      <p:sp>
-        <p:nvSpPr>
-          <p:cNvPr id="21" name="TextBox 20"/>
+          <p:cNvPr id="23" name="TextBox 22"/>
           <p:cNvSpPr txBox="1"/>
           <p:nvPr/>
         </p:nvSpPr>
         <p:spPr>
           <a:xfrm>
-            <a:off x="1428750" y="5762625"/>
-            <a:ext cx="419100" cy="304800"/>
-          </a:xfrm>
-          <a:prstGeom prst="rect">
-            <a:avLst/>
-          </a:prstGeom>
-          <a:noFill/>
-        </p:spPr>
-        <p:txBody>
-          <a:bodyPr wrap="square" lIns="0" rIns="0" tIns="0" bIns="0" anchor="t">
-            <a:spAutoFit/>
-          </a:bodyPr>
-          <a:lstStyle/>
-          <a:p>
-            <a:pPr algn="ctr">
-              <a:lnSpc>
-                <a:spcPct val="100000"/>
-              </a:lnSpc>
-            </a:pPr>
-            <a:r>
-              <a:rPr sz="1875" b="1">
-                <a:solidFill>
-                  <a:srgbClr val="FFFFFF"/>
-                </a:solidFill>
-                <a:latin typeface="Pretendard"/>
-                <a:ea typeface="Pretendard"/>
-                <a:cs typeface="Pretendard"/>
-              </a:rPr>
-              <a:t>3</a:t>
-            </a:r>
-          </a:p>
-        </p:txBody>
-      </p:sp>
-      <p:sp>
-        <p:nvSpPr>
-          <p:cNvPr id="22" name="TextBox 21"/>
-          <p:cNvSpPr txBox="1"/>
-          <p:nvPr/>
-        </p:nvSpPr>
-        <p:spPr>
-          <a:xfrm>
-            <a:off x="2057400" y="5543550"/>
-            <a:ext cx="14763750" cy="723900"/>
+            <a:off x="6038850" y="4171950"/>
+            <a:ext cx="5052060" cy="647700"/>
           </a:xfrm>
           <a:prstGeom prst="rect">
             <a:avLst/>
@@ -10636,31 +11228,10 @@
           </a:bodyPr>
           <a:lstStyle/>
           <a:p>
-            <a:pPr>
-              <a:lnSpc>
-                <a:spcPct val="120000"/>
-              </a:lnSpc>
-            </a:pPr>
-            <a:r>
-              <a:rPr sz="2175" b="1">
-                <a:solidFill>
-                  <a:srgbClr val="0D2B5E"/>
-                </a:solidFill>
-                <a:latin typeface="Pretendard"/>
-                <a:ea typeface="Pretendard"/>
-                <a:cs typeface="Pretendard"/>
-              </a:rPr>
-              <a:t>웹 UI 는 실무에서도 쓰나요?</a:t>
-            </a:r>
-          </a:p>
-          <a:p>
-            <a:pPr>
-              <a:lnSpc>
-                <a:spcPct val="130000"/>
-              </a:lnSpc>
-              <a:spcBef>
-                <a:spcPts val="300"/>
-              </a:spcBef>
+            <a:pPr algn="ctr">
+              <a:lnSpc>
+                <a:spcPct val="115000"/>
+              </a:lnSpc>
             </a:pPr>
             <a:r>
               <a:rPr sz="1875" b="0">
@@ -10671,25 +11242,43 @@
                 <a:ea typeface="Pretendard"/>
                 <a:cs typeface="Pretendard"/>
               </a:rPr>
-              <a:t>씁니다 — 느린 쿼리를 찾고 어느 단계가 오래 걸렸는지 보는 데</a:t>
-            </a:r>
-          </a:p>
-        </p:txBody>
-      </p:sp>
-      <p:sp>
-        <p:nvSpPr>
-          <p:cNvPr id="23" name="Rounded Rectangle 22"/>
-          <p:cNvSpPr/>
-          <p:nvPr/>
-        </p:nvSpPr>
-        <p:spPr>
-          <a:xfrm>
-            <a:off x="1143000" y="6496050"/>
-            <a:ext cx="16002000" cy="914400"/>
+              <a:t>endpoint 가 localhost</a:t>
+            </a:r>
+          </a:p>
+          <a:p>
+            <a:pPr algn="ctr">
+              <a:lnSpc>
+                <a:spcPct val="115000"/>
+              </a:lnSpc>
+            </a:pPr>
+            <a:r>
+              <a:rPr sz="1875" b="0">
+                <a:solidFill>
+                  <a:srgbClr val="3D3D3D"/>
+                </a:solidFill>
+                <a:latin typeface="Pretendard"/>
+                <a:ea typeface="Pretendard"/>
+                <a:cs typeface="Pretendard"/>
+              </a:rPr>
+              <a:t>path-style 빠짐</a:t>
+            </a:r>
+          </a:p>
+        </p:txBody>
+      </p:sp>
+      <p:sp>
+        <p:nvSpPr>
+          <p:cNvPr id="24" name="Rounded Rectangle 23"/>
+          <p:cNvSpPr/>
+          <p:nvPr/>
+        </p:nvSpPr>
+        <p:spPr>
+          <a:xfrm>
+            <a:off x="11224260" y="4171950"/>
+            <a:ext cx="5920740" cy="647700"/>
           </a:xfrm>
           <a:prstGeom prst="roundRect">
             <a:avLst>
-              <a:gd name="adj" fmla="val 5208"/>
+              <a:gd name="adj" fmla="val 5882"/>
             </a:avLst>
           </a:prstGeom>
           <a:solidFill>
@@ -10712,74 +11301,334 @@
       </p:sp>
       <p:sp>
         <p:nvSpPr>
-          <p:cNvPr id="24" name="Rectangle 23"/>
-          <p:cNvSpPr/>
-          <p:nvPr/>
-        </p:nvSpPr>
-        <p:spPr>
-          <a:xfrm>
-            <a:off x="1143000" y="6496050"/>
-            <a:ext cx="47625" cy="914400"/>
-          </a:xfrm>
-          <a:prstGeom prst="rect">
-            <a:avLst/>
-          </a:prstGeom>
-          <a:solidFill>
-            <a:srgbClr val="1E5BC6"/>
-          </a:solidFill>
-          <a:ln>
-            <a:noFill/>
-          </a:ln>
-          <a:effectLst/>
-        </p:spPr>
-        <p:txBody>
-          <a:bodyPr rtlCol="0" anchor="ctr" wrap="square"/>
-          <a:lstStyle/>
-          <a:p>
-            <a:pPr algn="ctr"/>
-          </a:p>
-        </p:txBody>
-      </p:sp>
-      <p:sp>
-        <p:nvSpPr>
-          <p:cNvPr id="25" name="Oval 24"/>
-          <p:cNvSpPr/>
-          <p:nvPr/>
-        </p:nvSpPr>
-        <p:spPr>
-          <a:xfrm>
-            <a:off x="1428750" y="6743700"/>
-            <a:ext cx="419100" cy="419100"/>
-          </a:xfrm>
-          <a:prstGeom prst="ellipse">
-            <a:avLst/>
-          </a:prstGeom>
-          <a:solidFill>
-            <a:srgbClr val="0D2B5E"/>
-          </a:solidFill>
-          <a:ln>
-            <a:noFill/>
-          </a:ln>
-          <a:effectLst/>
-        </p:spPr>
-        <p:txBody>
-          <a:bodyPr rtlCol="0" anchor="ctr" wrap="square"/>
-          <a:lstStyle/>
-          <a:p>
-            <a:pPr algn="ctr"/>
-          </a:p>
-        </p:txBody>
-      </p:sp>
-      <p:sp>
-        <p:nvSpPr>
-          <p:cNvPr id="26" name="TextBox 25"/>
+          <p:cNvPr id="25" name="TextBox 24"/>
           <p:cNvSpPr txBox="1"/>
           <p:nvPr/>
         </p:nvSpPr>
         <p:spPr>
           <a:xfrm>
-            <a:off x="1428750" y="6810375"/>
-            <a:ext cx="419100" cy="304800"/>
+            <a:off x="11319510" y="4171950"/>
+            <a:ext cx="5730240" cy="647700"/>
+          </a:xfrm>
+          <a:prstGeom prst="rect">
+            <a:avLst/>
+          </a:prstGeom>
+          <a:noFill/>
+        </p:spPr>
+        <p:txBody>
+          <a:bodyPr wrap="square" lIns="0" rIns="0" tIns="0" bIns="0" anchor="ctr">
+            <a:spAutoFit/>
+          </a:bodyPr>
+          <a:lstStyle/>
+          <a:p>
+            <a:pPr algn="ctr">
+              <a:lnSpc>
+                <a:spcPct val="115000"/>
+              </a:lnSpc>
+            </a:pPr>
+            <a:r>
+              <a:rPr sz="1875" b="0">
+                <a:solidFill>
+                  <a:srgbClr val="3D3D3D"/>
+                </a:solidFill>
+                <a:latin typeface="Pretendard"/>
+                <a:ea typeface="Pretendard"/>
+                <a:cs typeface="Pretendard"/>
+              </a:rPr>
+              <a:t>http://minio:9000</a:t>
+            </a:r>
+          </a:p>
+          <a:p>
+            <a:pPr algn="ctr">
+              <a:lnSpc>
+                <a:spcPct val="115000"/>
+              </a:lnSpc>
+            </a:pPr>
+            <a:r>
+              <a:rPr sz="1875" b="0">
+                <a:solidFill>
+                  <a:srgbClr val="3D3D3D"/>
+                </a:solidFill>
+                <a:latin typeface="Pretendard"/>
+                <a:ea typeface="Pretendard"/>
+                <a:cs typeface="Pretendard"/>
+              </a:rPr>
+              <a:t>path-style-access=true</a:t>
+            </a:r>
+          </a:p>
+        </p:txBody>
+      </p:sp>
+      <p:sp>
+        <p:nvSpPr>
+          <p:cNvPr id="26" name="Rounded Rectangle 25"/>
+          <p:cNvSpPr/>
+          <p:nvPr/>
+        </p:nvSpPr>
+        <p:spPr>
+          <a:xfrm>
+            <a:off x="1143000" y="4895850"/>
+            <a:ext cx="4762500" cy="647700"/>
+          </a:xfrm>
+          <a:prstGeom prst="roundRect">
+            <a:avLst>
+              <a:gd name="adj" fmla="val 5882"/>
+            </a:avLst>
+          </a:prstGeom>
+          <a:solidFill>
+            <a:srgbClr val="EDF3FD"/>
+          </a:solidFill>
+          <a:ln w="9525">
+            <a:solidFill>
+              <a:srgbClr val="BFD3F5"/>
+            </a:solidFill>
+          </a:ln>
+          <a:effectLst/>
+        </p:spPr>
+        <p:txBody>
+          <a:bodyPr rtlCol="0" anchor="ctr" wrap="square"/>
+          <a:lstStyle/>
+          <a:p>
+            <a:pPr algn="ctr"/>
+          </a:p>
+        </p:txBody>
+      </p:sp>
+      <p:sp>
+        <p:nvSpPr>
+          <p:cNvPr id="27" name="TextBox 26"/>
+          <p:cNvSpPr txBox="1"/>
+          <p:nvPr/>
+        </p:nvSpPr>
+        <p:spPr>
+          <a:xfrm>
+            <a:off x="1238250" y="4895850"/>
+            <a:ext cx="4572000" cy="647700"/>
+          </a:xfrm>
+          <a:prstGeom prst="rect">
+            <a:avLst/>
+          </a:prstGeom>
+          <a:noFill/>
+        </p:spPr>
+        <p:txBody>
+          <a:bodyPr wrap="square" lIns="0" rIns="0" tIns="0" bIns="0" anchor="ctr">
+            <a:spAutoFit/>
+          </a:bodyPr>
+          <a:lstStyle/>
+          <a:p>
+            <a:pPr algn="l">
+              <a:lnSpc>
+                <a:spcPct val="115000"/>
+              </a:lnSpc>
+            </a:pPr>
+            <a:r>
+              <a:rPr sz="1875" b="1">
+                <a:solidFill>
+                  <a:srgbClr val="0D2B5E"/>
+                </a:solidFill>
+                <a:latin typeface="Pretendard"/>
+                <a:ea typeface="Pretendard"/>
+                <a:cs typeface="Pretendard"/>
+              </a:rPr>
+              <a:t>두 엔진 행 수 다름</a:t>
+            </a:r>
+          </a:p>
+        </p:txBody>
+      </p:sp>
+      <p:sp>
+        <p:nvSpPr>
+          <p:cNvPr id="28" name="Rounded Rectangle 27"/>
+          <p:cNvSpPr/>
+          <p:nvPr/>
+        </p:nvSpPr>
+        <p:spPr>
+          <a:xfrm>
+            <a:off x="5943600" y="4895850"/>
+            <a:ext cx="5242560" cy="647700"/>
+          </a:xfrm>
+          <a:prstGeom prst="roundRect">
+            <a:avLst>
+              <a:gd name="adj" fmla="val 5882"/>
+            </a:avLst>
+          </a:prstGeom>
+          <a:solidFill>
+            <a:srgbClr val="FAFBFD"/>
+          </a:solidFill>
+          <a:ln w="9525">
+            <a:solidFill>
+              <a:srgbClr val="DCE1E8"/>
+            </a:solidFill>
+          </a:ln>
+          <a:effectLst/>
+        </p:spPr>
+        <p:txBody>
+          <a:bodyPr rtlCol="0" anchor="ctr" wrap="square"/>
+          <a:lstStyle/>
+          <a:p>
+            <a:pPr algn="ctr"/>
+          </a:p>
+        </p:txBody>
+      </p:sp>
+      <p:sp>
+        <p:nvSpPr>
+          <p:cNvPr id="29" name="TextBox 28"/>
+          <p:cNvSpPr txBox="1"/>
+          <p:nvPr/>
+        </p:nvSpPr>
+        <p:spPr>
+          <a:xfrm>
+            <a:off x="6038850" y="4895850"/>
+            <a:ext cx="5052060" cy="647700"/>
+          </a:xfrm>
+          <a:prstGeom prst="rect">
+            <a:avLst/>
+          </a:prstGeom>
+          <a:noFill/>
+        </p:spPr>
+        <p:txBody>
+          <a:bodyPr wrap="square" lIns="0" rIns="0" tIns="0" bIns="0" anchor="ctr">
+            <a:spAutoFit/>
+          </a:bodyPr>
+          <a:lstStyle/>
+          <a:p>
+            <a:pPr algn="ctr">
+              <a:lnSpc>
+                <a:spcPct val="115000"/>
+              </a:lnSpc>
+            </a:pPr>
+            <a:r>
+              <a:rPr sz="1875" b="0">
+                <a:solidFill>
+                  <a:srgbClr val="3D3D3D"/>
+                </a:solidFill>
+                <a:latin typeface="Pretendard"/>
+                <a:ea typeface="Pretendard"/>
+                <a:cs typeface="Pretendard"/>
+              </a:rPr>
+              <a:t>다른 카탈로그·</a:t>
+            </a:r>
+          </a:p>
+          <a:p>
+            <a:pPr algn="ctr">
+              <a:lnSpc>
+                <a:spcPct val="115000"/>
+              </a:lnSpc>
+            </a:pPr>
+            <a:r>
+              <a:rPr sz="1875" b="0">
+                <a:solidFill>
+                  <a:srgbClr val="3D3D3D"/>
+                </a:solidFill>
+                <a:latin typeface="Pretendard"/>
+                <a:ea typeface="Pretendard"/>
+                <a:cs typeface="Pretendard"/>
+              </a:rPr>
+              <a:t>다른 warehouse</a:t>
+            </a:r>
+          </a:p>
+        </p:txBody>
+      </p:sp>
+      <p:sp>
+        <p:nvSpPr>
+          <p:cNvPr id="30" name="Rounded Rectangle 29"/>
+          <p:cNvSpPr/>
+          <p:nvPr/>
+        </p:nvSpPr>
+        <p:spPr>
+          <a:xfrm>
+            <a:off x="11224260" y="4895850"/>
+            <a:ext cx="5920740" cy="647700"/>
+          </a:xfrm>
+          <a:prstGeom prst="roundRect">
+            <a:avLst>
+              <a:gd name="adj" fmla="val 5882"/>
+            </a:avLst>
+          </a:prstGeom>
+          <a:solidFill>
+            <a:srgbClr val="FAFBFD"/>
+          </a:solidFill>
+          <a:ln w="9525">
+            <a:solidFill>
+              <a:srgbClr val="DCE1E8"/>
+            </a:solidFill>
+          </a:ln>
+          <a:effectLst/>
+        </p:spPr>
+        <p:txBody>
+          <a:bodyPr rtlCol="0" anchor="ctr" wrap="square"/>
+          <a:lstStyle/>
+          <a:p>
+            <a:pPr algn="ctr"/>
+          </a:p>
+        </p:txBody>
+      </p:sp>
+      <p:sp>
+        <p:nvSpPr>
+          <p:cNvPr id="31" name="TextBox 30"/>
+          <p:cNvSpPr txBox="1"/>
+          <p:nvPr/>
+        </p:nvSpPr>
+        <p:spPr>
+          <a:xfrm>
+            <a:off x="11319510" y="4895850"/>
+            <a:ext cx="5730240" cy="647700"/>
+          </a:xfrm>
+          <a:prstGeom prst="rect">
+            <a:avLst/>
+          </a:prstGeom>
+          <a:noFill/>
+        </p:spPr>
+        <p:txBody>
+          <a:bodyPr wrap="square" lIns="0" rIns="0" tIns="0" bIns="0" anchor="ctr">
+            <a:spAutoFit/>
+          </a:bodyPr>
+          <a:lstStyle/>
+          <a:p>
+            <a:pPr algn="ctr">
+              <a:lnSpc>
+                <a:spcPct val="115000"/>
+              </a:lnSpc>
+            </a:pPr>
+            <a:r>
+              <a:rPr sz="1875" b="0">
+                <a:solidFill>
+                  <a:srgbClr val="3D3D3D"/>
+                </a:solidFill>
+                <a:latin typeface="Pretendard"/>
+                <a:ea typeface="Pretendard"/>
+                <a:cs typeface="Pretendard"/>
+              </a:rPr>
+              <a:t>rest:8181 과</a:t>
+            </a:r>
+          </a:p>
+          <a:p>
+            <a:pPr algn="ctr">
+              <a:lnSpc>
+                <a:spcPct val="115000"/>
+              </a:lnSpc>
+            </a:pPr>
+            <a:r>
+              <a:rPr sz="1875" b="0">
+                <a:solidFill>
+                  <a:srgbClr val="3D3D3D"/>
+                </a:solidFill>
+                <a:latin typeface="Pretendard"/>
+                <a:ea typeface="Pretendard"/>
+                <a:cs typeface="Pretendard"/>
+              </a:rPr>
+              <a:t>s3://warehouse/ 대조</a:t>
+            </a:r>
+          </a:p>
+        </p:txBody>
+      </p:sp>
+      <p:sp>
+        <p:nvSpPr>
+          <p:cNvPr id="32" name="TextBox 31"/>
+          <p:cNvSpPr txBox="1"/>
+          <p:nvPr/>
+        </p:nvSpPr>
+        <p:spPr>
+          <a:xfrm>
+            <a:off x="1143000" y="7620000"/>
+            <a:ext cx="16002000" cy="342900"/>
           </a:xfrm>
           <a:prstGeom prst="rect">
             <a:avLst/>
@@ -10792,7 +11641,7 @@
           </a:bodyPr>
           <a:lstStyle/>
           <a:p>
-            <a:pPr algn="ctr">
+            <a:pPr algn="l">
               <a:lnSpc>
                 <a:spcPct val="100000"/>
               </a:lnSpc>
@@ -10800,82 +11649,20 @@
             <a:r>
               <a:rPr sz="1875" b="1">
                 <a:solidFill>
-                  <a:srgbClr val="FFFFFF"/>
-                </a:solidFill>
-                <a:latin typeface="Pretendard"/>
-                <a:ea typeface="Pretendard"/>
-                <a:cs typeface="Pretendard"/>
-              </a:rPr>
-              <a:t>4</a:t>
-            </a:r>
-          </a:p>
-        </p:txBody>
-      </p:sp>
-      <p:sp>
-        <p:nvSpPr>
-          <p:cNvPr id="27" name="TextBox 26"/>
-          <p:cNvSpPr txBox="1"/>
-          <p:nvPr/>
-        </p:nvSpPr>
-        <p:spPr>
-          <a:xfrm>
-            <a:off x="2057400" y="6591300"/>
-            <a:ext cx="14763750" cy="723900"/>
-          </a:xfrm>
-          <a:prstGeom prst="rect">
-            <a:avLst/>
-          </a:prstGeom>
-          <a:noFill/>
-        </p:spPr>
-        <p:txBody>
-          <a:bodyPr wrap="square" lIns="0" rIns="0" tIns="0" bIns="0" anchor="ctr">
-            <a:spAutoFit/>
-          </a:bodyPr>
-          <a:lstStyle/>
-          <a:p>
-            <a:pPr>
-              <a:lnSpc>
-                <a:spcPct val="120000"/>
-              </a:lnSpc>
-            </a:pPr>
-            <a:r>
-              <a:rPr sz="2175" b="1">
-                <a:solidFill>
-                  <a:srgbClr val="0D2B5E"/>
-                </a:solidFill>
-                <a:latin typeface="Pretendard"/>
-                <a:ea typeface="Pretendard"/>
-                <a:cs typeface="Pretendard"/>
-              </a:rPr>
-              <a:t>카탈로그 파일을 고치면 재시작?</a:t>
-            </a:r>
-          </a:p>
-          <a:p>
-            <a:pPr>
-              <a:lnSpc>
-                <a:spcPct val="130000"/>
-              </a:lnSpc>
-              <a:spcBef>
-                <a:spcPts val="300"/>
-              </a:spcBef>
-            </a:pPr>
-            <a:r>
-              <a:rPr sz="1875" b="0">
-                <a:solidFill>
-                  <a:srgbClr val="3D3D3D"/>
-                </a:solidFill>
-                <a:latin typeface="Pretendard"/>
-                <a:ea typeface="Pretendard"/>
-                <a:cs typeface="Pretendard"/>
-              </a:rPr>
-              <a:t>네 — docker compose restart trino 로 다시 읽힙니다</a:t>
-            </a:r>
-          </a:p>
-        </p:txBody>
-      </p:sp>
-      <p:sp>
-        <p:nvSpPr>
-          <p:cNvPr id="28" name="Rectangle 27"/>
+                  <a:srgbClr val="7D7D7D"/>
+                </a:solidFill>
+                <a:latin typeface="Pretendard"/>
+                <a:ea typeface="Pretendard"/>
+                <a:cs typeface="Pretendard"/>
+              </a:rPr>
+              <a:t>136초 뒤 Error processing metadata for table lakehouse.orders — 목록은 rest 카탈로그가 줘서 SHOW TABLES 는 됨</a:t>
+            </a:r>
+          </a:p>
+        </p:txBody>
+      </p:sp>
+      <p:sp>
+        <p:nvSpPr>
+          <p:cNvPr id="33" name="Rectangle 32"/>
           <p:cNvSpPr/>
           <p:nvPr/>
         </p:nvSpPr>
@@ -10905,7 +11692,7 @@
       </p:sp>
       <p:sp>
         <p:nvSpPr>
-          <p:cNvPr id="29" name="TextBox 28"/>
+          <p:cNvPr id="34" name="TextBox 33"/>
           <p:cNvSpPr txBox="1"/>
           <p:nvPr/>
         </p:nvSpPr>
@@ -10946,7 +11733,7 @@
       </p:sp>
       <p:sp>
         <p:nvSpPr>
-          <p:cNvPr id="30" name="TextBox 29"/>
+          <p:cNvPr id="35" name="TextBox 34"/>
           <p:cNvSpPr txBox="1"/>
           <p:nvPr/>
         </p:nvSpPr>
@@ -11005,7 +11792,7 @@
       <p:grpSpPr/>
       <p:sp>
         <p:nvSpPr>
-          <p:cNvPr id="2" name="Oval 1"/>
+          <p:cNvPr id="2" name="deckgen:decor"/>
           <p:cNvSpPr/>
           <p:nvPr/>
         </p:nvSpPr>
@@ -11035,7 +11822,7 @@
       </p:sp>
       <p:sp>
         <p:nvSpPr>
-          <p:cNvPr id="3" name="Oval 2"/>
+          <p:cNvPr id="3" name="deckgen:decor"/>
           <p:cNvSpPr/>
           <p:nvPr/>
         </p:nvSpPr>
@@ -11065,7 +11852,7 @@
       </p:sp>
       <p:sp>
         <p:nvSpPr>
-          <p:cNvPr id="4" name="Oval 3"/>
+          <p:cNvPr id="4" name="deckgen:decor"/>
           <p:cNvSpPr/>
           <p:nvPr/>
         </p:nvSpPr>
@@ -11129,7 +11916,7 @@
                 <a:ea typeface="Pretendard"/>
                 <a:cs typeface="Pretendard"/>
               </a:rPr>
-              <a:t>다음 회차 예고</a:t>
+              <a:t>예상 질문</a:t>
             </a:r>
           </a:p>
         </p:txBody>
@@ -11170,7 +11957,7 @@
                 <a:ea typeface="Pretendard"/>
                 <a:cs typeface="Pretendard"/>
               </a:rPr>
-              <a:t>4-5 · 데이터 카탈로그 연결 및 레이크하우스 통합</a:t>
+              <a:t>자주 나오는 질문 네 가지</a:t>
             </a:r>
           </a:p>
         </p:txBody>
@@ -11213,12 +12000,12 @@
         </p:nvSpPr>
         <p:spPr>
           <a:xfrm>
-            <a:off x="1143000" y="3429000"/>
-            <a:ext cx="3714750" cy="2476500"/>
+            <a:off x="1143000" y="3352800"/>
+            <a:ext cx="16002000" cy="914400"/>
           </a:xfrm>
           <a:prstGeom prst="roundRect">
             <a:avLst>
-              <a:gd name="adj" fmla="val 1923"/>
+              <a:gd name="adj" fmla="val 5208"/>
             </a:avLst>
           </a:prstGeom>
           <a:solidFill>
@@ -11247,8 +12034,8 @@
         </p:nvSpPr>
         <p:spPr>
           <a:xfrm>
-            <a:off x="1143000" y="3429000"/>
-            <a:ext cx="3714750" cy="47625"/>
+            <a:off x="1143000" y="3352800"/>
+            <a:ext cx="47625" cy="914400"/>
           </a:xfrm>
           <a:prstGeom prst="rect">
             <a:avLst/>
@@ -11271,14 +12058,44 @@
       </p:sp>
       <p:sp>
         <p:nvSpPr>
-          <p:cNvPr id="10" name="TextBox 9"/>
+          <p:cNvPr id="10" name="Oval 9"/>
+          <p:cNvSpPr/>
+          <p:nvPr/>
+        </p:nvSpPr>
+        <p:spPr>
+          <a:xfrm>
+            <a:off x="1428750" y="3600450"/>
+            <a:ext cx="419100" cy="419100"/>
+          </a:xfrm>
+          <a:prstGeom prst="ellipse">
+            <a:avLst/>
+          </a:prstGeom>
+          <a:solidFill>
+            <a:srgbClr val="0D2B5E"/>
+          </a:solidFill>
+          <a:ln>
+            <a:noFill/>
+          </a:ln>
+          <a:effectLst/>
+        </p:spPr>
+        <p:txBody>
+          <a:bodyPr rtlCol="0" anchor="ctr" wrap="square"/>
+          <a:lstStyle/>
+          <a:p>
+            <a:pPr algn="ctr"/>
+          </a:p>
+        </p:txBody>
+      </p:sp>
+      <p:sp>
+        <p:nvSpPr>
+          <p:cNvPr id="11" name="TextBox 10"/>
           <p:cNvSpPr txBox="1"/>
           <p:nvPr/>
         </p:nvSpPr>
         <p:spPr>
           <a:xfrm>
-            <a:off x="4000500" y="3638550"/>
-            <a:ext cx="590550" cy="400050"/>
+            <a:off x="1428750" y="3667125"/>
+            <a:ext cx="419100" cy="304800"/>
           </a:xfrm>
           <a:prstGeom prst="rect">
             <a:avLst/>
@@ -11291,35 +12108,35 @@
           </a:bodyPr>
           <a:lstStyle/>
           <a:p>
-            <a:pPr algn="r">
+            <a:pPr algn="ctr">
               <a:lnSpc>
                 <a:spcPct val="100000"/>
               </a:lnSpc>
             </a:pPr>
             <a:r>
-              <a:rPr sz="2550" b="1">
-                <a:solidFill>
-                  <a:srgbClr val="E4EBF4"/>
-                </a:solidFill>
-                <a:latin typeface="Pretendard"/>
-                <a:ea typeface="Pretendard"/>
-                <a:cs typeface="Pretendard"/>
-              </a:rPr>
-              <a:t>01</a:t>
-            </a:r>
-          </a:p>
-        </p:txBody>
-      </p:sp>
-      <p:sp>
-        <p:nvSpPr>
-          <p:cNvPr id="11" name="TextBox 10"/>
+              <a:rPr sz="1875" b="1">
+                <a:solidFill>
+                  <a:srgbClr val="FFFFFF"/>
+                </a:solidFill>
+                <a:latin typeface="Pretendard"/>
+                <a:ea typeface="Pretendard"/>
+                <a:cs typeface="Pretendard"/>
+              </a:rPr>
+              <a:t>1</a:t>
+            </a:r>
+          </a:p>
+        </p:txBody>
+      </p:sp>
+      <p:sp>
+        <p:nvSpPr>
+          <p:cNvPr id="12" name="TextBox 11"/>
           <p:cNvSpPr txBox="1"/>
           <p:nvPr/>
         </p:nvSpPr>
         <p:spPr>
           <a:xfrm>
-            <a:off x="1466850" y="3752850"/>
-            <a:ext cx="3067050" cy="1828800"/>
+            <a:off x="2057400" y="3448050"/>
+            <a:ext cx="14763750" cy="723900"/>
           </a:xfrm>
           <a:prstGeom prst="rect">
             <a:avLst/>
@@ -11334,11 +12151,11 @@
           <a:p>
             <a:pPr>
               <a:lnSpc>
-                <a:spcPct val="115000"/>
-              </a:lnSpc>
-            </a:pPr>
-            <a:r>
-              <a:rPr sz="2700" b="1">
+                <a:spcPct val="120000"/>
+              </a:lnSpc>
+            </a:pPr>
+            <a:r>
+              <a:rPr sz="2175" b="1">
                 <a:solidFill>
                   <a:srgbClr val="0D2B5E"/>
                 </a:solidFill>
@@ -11346,20 +12163,20 @@
                 <a:ea typeface="Pretendard"/>
                 <a:cs typeface="Pretendard"/>
               </a:rPr>
-              <a:t>이론 1H</a:t>
+              <a:t>Trino 로 다 하면 안 되나요?</a:t>
             </a:r>
           </a:p>
           <a:p>
             <a:pPr>
               <a:lnSpc>
-                <a:spcPct val="146000"/>
+                <a:spcPct val="130000"/>
               </a:lnSpc>
               <a:spcBef>
-                <a:spcPts val="1050"/>
+                <a:spcPts val="300"/>
               </a:spcBef>
             </a:pPr>
             <a:r>
-              <a:rPr sz="2025" b="0">
+              <a:rPr sz="1875" b="0">
                 <a:solidFill>
                   <a:srgbClr val="3D3D3D"/>
                 </a:solidFill>
@@ -11367,228 +12184,25 @@
                 <a:ea typeface="Pretendard"/>
                 <a:cs typeface="Pretendard"/>
               </a:rPr>
-              <a:t>데이터 카탈로그의</a:t>
-            </a:r>
-          </a:p>
-          <a:p>
-            <a:pPr>
-              <a:lnSpc>
-                <a:spcPct val="146000"/>
-              </a:lnSpc>
-            </a:pPr>
-            <a:r>
-              <a:rPr sz="2025" b="0">
-                <a:solidFill>
-                  <a:srgbClr val="3D3D3D"/>
-                </a:solidFill>
-                <a:latin typeface="Pretendard"/>
-                <a:ea typeface="Pretendard"/>
-                <a:cs typeface="Pretendard"/>
-              </a:rPr>
-              <a:t>역할</a:t>
-            </a:r>
-          </a:p>
-        </p:txBody>
-      </p:sp>
-      <p:sp>
-        <p:nvSpPr>
-          <p:cNvPr id="12" name="Rounded Rectangle 11"/>
-          <p:cNvSpPr/>
-          <p:nvPr/>
-        </p:nvSpPr>
-        <p:spPr>
-          <a:xfrm>
-            <a:off x="5238750" y="3429000"/>
-            <a:ext cx="3714750" cy="2476500"/>
+              <a:t>대량 변환·MERGE 는 Spark — Trino 는 실패하면 처음부터 다시 하므로 몇 시간짜리엔 부적합</a:t>
+            </a:r>
+          </a:p>
+        </p:txBody>
+      </p:sp>
+      <p:sp>
+        <p:nvSpPr>
+          <p:cNvPr id="13" name="Rounded Rectangle 12"/>
+          <p:cNvSpPr/>
+          <p:nvPr/>
+        </p:nvSpPr>
+        <p:spPr>
+          <a:xfrm>
+            <a:off x="1143000" y="4400550"/>
+            <a:ext cx="16002000" cy="914400"/>
           </a:xfrm>
           <a:prstGeom prst="roundRect">
             <a:avLst>
-              <a:gd name="adj" fmla="val 1923"/>
-            </a:avLst>
-          </a:prstGeom>
-          <a:solidFill>
-            <a:srgbClr val="0D2B5E"/>
-          </a:solidFill>
-          <a:ln w="9525">
-            <a:solidFill>
-              <a:srgbClr val="0D2B5E"/>
-            </a:solidFill>
-          </a:ln>
-          <a:effectLst/>
-        </p:spPr>
-        <p:txBody>
-          <a:bodyPr rtlCol="0" anchor="ctr" wrap="square"/>
-          <a:lstStyle/>
-          <a:p>
-            <a:pPr algn="ctr"/>
-          </a:p>
-        </p:txBody>
-      </p:sp>
-      <p:sp>
-        <p:nvSpPr>
-          <p:cNvPr id="13" name="Rectangle 12"/>
-          <p:cNvSpPr/>
-          <p:nvPr/>
-        </p:nvSpPr>
-        <p:spPr>
-          <a:xfrm>
-            <a:off x="5238750" y="3429000"/>
-            <a:ext cx="3714750" cy="47625"/>
-          </a:xfrm>
-          <a:prstGeom prst="rect">
-            <a:avLst/>
-          </a:prstGeom>
-          <a:solidFill>
-            <a:srgbClr val="1E5BC6"/>
-          </a:solidFill>
-          <a:ln>
-            <a:noFill/>
-          </a:ln>
-          <a:effectLst/>
-        </p:spPr>
-        <p:txBody>
-          <a:bodyPr rtlCol="0" anchor="ctr" wrap="square"/>
-          <a:lstStyle/>
-          <a:p>
-            <a:pPr algn="ctr"/>
-          </a:p>
-        </p:txBody>
-      </p:sp>
-      <p:sp>
-        <p:nvSpPr>
-          <p:cNvPr id="14" name="TextBox 13"/>
-          <p:cNvSpPr txBox="1"/>
-          <p:nvPr/>
-        </p:nvSpPr>
-        <p:spPr>
-          <a:xfrm>
-            <a:off x="8096250" y="3638550"/>
-            <a:ext cx="590550" cy="400050"/>
-          </a:xfrm>
-          <a:prstGeom prst="rect">
-            <a:avLst/>
-          </a:prstGeom>
-          <a:noFill/>
-        </p:spPr>
-        <p:txBody>
-          <a:bodyPr wrap="square" lIns="0" rIns="0" tIns="0" bIns="0" anchor="t">
-            <a:spAutoFit/>
-          </a:bodyPr>
-          <a:lstStyle/>
-          <a:p>
-            <a:pPr algn="r">
-              <a:lnSpc>
-                <a:spcPct val="100000"/>
-              </a:lnSpc>
-            </a:pPr>
-            <a:r>
-              <a:rPr sz="2550" b="1">
-                <a:solidFill>
-                  <a:srgbClr val="3B4B7C"/>
-                </a:solidFill>
-                <a:latin typeface="Pretendard"/>
-                <a:ea typeface="Pretendard"/>
-                <a:cs typeface="Pretendard"/>
-              </a:rPr>
-              <a:t>02</a:t>
-            </a:r>
-          </a:p>
-        </p:txBody>
-      </p:sp>
-      <p:sp>
-        <p:nvSpPr>
-          <p:cNvPr id="15" name="TextBox 14"/>
-          <p:cNvSpPr txBox="1"/>
-          <p:nvPr/>
-        </p:nvSpPr>
-        <p:spPr>
-          <a:xfrm>
-            <a:off x="5562600" y="3752850"/>
-            <a:ext cx="3067050" cy="1828800"/>
-          </a:xfrm>
-          <a:prstGeom prst="rect">
-            <a:avLst/>
-          </a:prstGeom>
-          <a:noFill/>
-        </p:spPr>
-        <p:txBody>
-          <a:bodyPr wrap="square" lIns="0" rIns="0" tIns="0" bIns="0" anchor="ctr">
-            <a:spAutoFit/>
-          </a:bodyPr>
-          <a:lstStyle/>
-          <a:p>
-            <a:pPr>
-              <a:lnSpc>
-                <a:spcPct val="115000"/>
-              </a:lnSpc>
-            </a:pPr>
-            <a:r>
-              <a:rPr sz="2700" b="1">
-                <a:solidFill>
-                  <a:srgbClr val="FFFFFF"/>
-                </a:solidFill>
-                <a:latin typeface="Pretendard"/>
-                <a:ea typeface="Pretendard"/>
-                <a:cs typeface="Pretendard"/>
-              </a:rPr>
-              <a:t>실습 1.5H</a:t>
-            </a:r>
-          </a:p>
-          <a:p>
-            <a:pPr>
-              <a:lnSpc>
-                <a:spcPct val="146000"/>
-              </a:lnSpc>
-              <a:spcBef>
-                <a:spcPts val="1050"/>
-              </a:spcBef>
-            </a:pPr>
-            <a:r>
-              <a:rPr sz="2025" b="0">
-                <a:solidFill>
-                  <a:srgbClr val="D9E2F0"/>
-                </a:solidFill>
-                <a:latin typeface="Pretendard"/>
-                <a:ea typeface="Pretendard"/>
-                <a:cs typeface="Pretendard"/>
-              </a:rPr>
-              <a:t>Spark–Trino</a:t>
-            </a:r>
-          </a:p>
-          <a:p>
-            <a:pPr>
-              <a:lnSpc>
-                <a:spcPct val="146000"/>
-              </a:lnSpc>
-            </a:pPr>
-            <a:r>
-              <a:rPr sz="2025" b="0">
-                <a:solidFill>
-                  <a:srgbClr val="D9E2F0"/>
-                </a:solidFill>
-                <a:latin typeface="Pretendard"/>
-                <a:ea typeface="Pretendard"/>
-                <a:cs typeface="Pretendard"/>
-              </a:rPr>
-              <a:t>상호운용 검증</a:t>
-            </a:r>
-          </a:p>
-        </p:txBody>
-      </p:sp>
-      <p:sp>
-        <p:nvSpPr>
-          <p:cNvPr id="16" name="Rounded Rectangle 15"/>
-          <p:cNvSpPr/>
-          <p:nvPr/>
-        </p:nvSpPr>
-        <p:spPr>
-          <a:xfrm>
-            <a:off x="9334500" y="3429000"/>
-            <a:ext cx="3714750" cy="2476500"/>
-          </a:xfrm>
-          <a:prstGeom prst="roundRect">
-            <a:avLst>
-              <a:gd name="adj" fmla="val 1923"/>
+              <a:gd name="adj" fmla="val 5208"/>
             </a:avLst>
           </a:prstGeom>
           <a:solidFill>
@@ -11611,14 +12225,14 @@
       </p:sp>
       <p:sp>
         <p:nvSpPr>
-          <p:cNvPr id="17" name="Rectangle 16"/>
-          <p:cNvSpPr/>
-          <p:nvPr/>
-        </p:nvSpPr>
-        <p:spPr>
-          <a:xfrm>
-            <a:off x="9334500" y="3429000"/>
-            <a:ext cx="3714750" cy="47625"/>
+          <p:cNvPr id="14" name="Rectangle 13"/>
+          <p:cNvSpPr/>
+          <p:nvPr/>
+        </p:nvSpPr>
+        <p:spPr>
+          <a:xfrm>
+            <a:off x="1143000" y="4400550"/>
+            <a:ext cx="47625" cy="914400"/>
           </a:xfrm>
           <a:prstGeom prst="rect">
             <a:avLst/>
@@ -11641,14 +12255,44 @@
       </p:sp>
       <p:sp>
         <p:nvSpPr>
-          <p:cNvPr id="18" name="TextBox 17"/>
+          <p:cNvPr id="15" name="Oval 14"/>
+          <p:cNvSpPr/>
+          <p:nvPr/>
+        </p:nvSpPr>
+        <p:spPr>
+          <a:xfrm>
+            <a:off x="1428750" y="4648200"/>
+            <a:ext cx="419100" cy="419100"/>
+          </a:xfrm>
+          <a:prstGeom prst="ellipse">
+            <a:avLst/>
+          </a:prstGeom>
+          <a:solidFill>
+            <a:srgbClr val="0D2B5E"/>
+          </a:solidFill>
+          <a:ln>
+            <a:noFill/>
+          </a:ln>
+          <a:effectLst/>
+        </p:spPr>
+        <p:txBody>
+          <a:bodyPr rtlCol="0" anchor="ctr" wrap="square"/>
+          <a:lstStyle/>
+          <a:p>
+            <a:pPr algn="ctr"/>
+          </a:p>
+        </p:txBody>
+      </p:sp>
+      <p:sp>
+        <p:nvSpPr>
+          <p:cNvPr id="16" name="TextBox 15"/>
           <p:cNvSpPr txBox="1"/>
           <p:nvPr/>
         </p:nvSpPr>
         <p:spPr>
           <a:xfrm>
-            <a:off x="12192000" y="3638550"/>
-            <a:ext cx="590550" cy="400050"/>
+            <a:off x="1428750" y="4714875"/>
+            <a:ext cx="419100" cy="304800"/>
           </a:xfrm>
           <a:prstGeom prst="rect">
             <a:avLst/>
@@ -11661,35 +12305,35 @@
           </a:bodyPr>
           <a:lstStyle/>
           <a:p>
-            <a:pPr algn="r">
+            <a:pPr algn="ctr">
               <a:lnSpc>
                 <a:spcPct val="100000"/>
               </a:lnSpc>
             </a:pPr>
             <a:r>
-              <a:rPr sz="2550" b="1">
-                <a:solidFill>
-                  <a:srgbClr val="E4EBF4"/>
-                </a:solidFill>
-                <a:latin typeface="Pretendard"/>
-                <a:ea typeface="Pretendard"/>
-                <a:cs typeface="Pretendard"/>
-              </a:rPr>
-              <a:t>03</a:t>
-            </a:r>
-          </a:p>
-        </p:txBody>
-      </p:sp>
-      <p:sp>
-        <p:nvSpPr>
-          <p:cNvPr id="19" name="TextBox 18"/>
+              <a:rPr sz="1875" b="1">
+                <a:solidFill>
+                  <a:srgbClr val="FFFFFF"/>
+                </a:solidFill>
+                <a:latin typeface="Pretendard"/>
+                <a:ea typeface="Pretendard"/>
+                <a:cs typeface="Pretendard"/>
+              </a:rPr>
+              <a:t>2</a:t>
+            </a:r>
+          </a:p>
+        </p:txBody>
+      </p:sp>
+      <p:sp>
+        <p:nvSpPr>
+          <p:cNvPr id="17" name="TextBox 16"/>
           <p:cNvSpPr txBox="1"/>
           <p:nvPr/>
         </p:nvSpPr>
         <p:spPr>
           <a:xfrm>
-            <a:off x="9658350" y="3752850"/>
-            <a:ext cx="3067050" cy="1828800"/>
+            <a:off x="2057400" y="4495800"/>
+            <a:ext cx="14763750" cy="723900"/>
           </a:xfrm>
           <a:prstGeom prst="rect">
             <a:avLst/>
@@ -11704,11 +12348,11 @@
           <a:p>
             <a:pPr>
               <a:lnSpc>
-                <a:spcPct val="115000"/>
-              </a:lnSpc>
-            </a:pPr>
-            <a:r>
-              <a:rPr sz="2700" b="1">
+                <a:spcPct val="120000"/>
+              </a:lnSpc>
+            </a:pPr>
+            <a:r>
+              <a:rPr sz="2175" b="1">
                 <a:solidFill>
                   <a:srgbClr val="0D2B5E"/>
                 </a:solidFill>
@@ -11716,20 +12360,20 @@
                 <a:ea typeface="Pretendard"/>
                 <a:cs typeface="Pretendard"/>
               </a:rPr>
-              <a:t>실습 1H</a:t>
+              <a:t>여러 소스를 조인한다는 뜻은?</a:t>
             </a:r>
           </a:p>
           <a:p>
             <a:pPr>
               <a:lnSpc>
-                <a:spcPct val="146000"/>
+                <a:spcPct val="130000"/>
               </a:lnSpc>
               <a:spcBef>
-                <a:spcPts val="1050"/>
+                <a:spcPts val="300"/>
               </a:spcBef>
             </a:pPr>
             <a:r>
-              <a:rPr sz="2025" b="0">
+              <a:rPr sz="1875" b="0">
                 <a:solidFill>
                   <a:srgbClr val="3D3D3D"/>
                 </a:solidFill>
@@ -11737,43 +12381,25 @@
                 <a:ea typeface="Pretendard"/>
                 <a:cs typeface="Pretendard"/>
               </a:rPr>
-              <a:t>레이크하우스</a:t>
-            </a:r>
-          </a:p>
-          <a:p>
-            <a:pPr>
-              <a:lnSpc>
-                <a:spcPct val="146000"/>
-              </a:lnSpc>
-            </a:pPr>
-            <a:r>
-              <a:rPr sz="2025" b="0">
-                <a:solidFill>
-                  <a:srgbClr val="3D3D3D"/>
-                </a:solidFill>
-                <a:latin typeface="Pretendard"/>
-                <a:ea typeface="Pretendard"/>
-                <a:cs typeface="Pretendard"/>
-              </a:rPr>
-              <a:t>통합 산출물</a:t>
-            </a:r>
-          </a:p>
-        </p:txBody>
-      </p:sp>
-      <p:sp>
-        <p:nvSpPr>
-          <p:cNvPr id="20" name="Rounded Rectangle 19"/>
-          <p:cNvSpPr/>
-          <p:nvPr/>
-        </p:nvSpPr>
-        <p:spPr>
-          <a:xfrm>
-            <a:off x="13430250" y="3429000"/>
-            <a:ext cx="3714750" cy="2476500"/>
+              <a:t>mysql.properties 를 하나 더 두면 iceberg.lakehouse.orders 와 mysql.shop.customers 를 한 SQL 로</a:t>
+            </a:r>
+          </a:p>
+        </p:txBody>
+      </p:sp>
+      <p:sp>
+        <p:nvSpPr>
+          <p:cNvPr id="18" name="Rounded Rectangle 17"/>
+          <p:cNvSpPr/>
+          <p:nvPr/>
+        </p:nvSpPr>
+        <p:spPr>
+          <a:xfrm>
+            <a:off x="1143000" y="5448300"/>
+            <a:ext cx="16002000" cy="914400"/>
           </a:xfrm>
           <a:prstGeom prst="roundRect">
             <a:avLst>
-              <a:gd name="adj" fmla="val 1923"/>
+              <a:gd name="adj" fmla="val 5208"/>
             </a:avLst>
           </a:prstGeom>
           <a:solidFill>
@@ -11796,14 +12422,14 @@
       </p:sp>
       <p:sp>
         <p:nvSpPr>
-          <p:cNvPr id="21" name="Rectangle 20"/>
-          <p:cNvSpPr/>
-          <p:nvPr/>
-        </p:nvSpPr>
-        <p:spPr>
-          <a:xfrm>
-            <a:off x="13430250" y="3429000"/>
-            <a:ext cx="3714750" cy="47625"/>
+          <p:cNvPr id="19" name="Rectangle 18"/>
+          <p:cNvSpPr/>
+          <p:nvPr/>
+        </p:nvSpPr>
+        <p:spPr>
+          <a:xfrm>
+            <a:off x="1143000" y="5448300"/>
+            <a:ext cx="47625" cy="914400"/>
           </a:xfrm>
           <a:prstGeom prst="rect">
             <a:avLst/>
@@ -11826,14 +12452,44 @@
       </p:sp>
       <p:sp>
         <p:nvSpPr>
-          <p:cNvPr id="22" name="TextBox 21"/>
+          <p:cNvPr id="20" name="Oval 19"/>
+          <p:cNvSpPr/>
+          <p:nvPr/>
+        </p:nvSpPr>
+        <p:spPr>
+          <a:xfrm>
+            <a:off x="1428750" y="5695950"/>
+            <a:ext cx="419100" cy="419100"/>
+          </a:xfrm>
+          <a:prstGeom prst="ellipse">
+            <a:avLst/>
+          </a:prstGeom>
+          <a:solidFill>
+            <a:srgbClr val="0D2B5E"/>
+          </a:solidFill>
+          <a:ln>
+            <a:noFill/>
+          </a:ln>
+          <a:effectLst/>
+        </p:spPr>
+        <p:txBody>
+          <a:bodyPr rtlCol="0" anchor="ctr" wrap="square"/>
+          <a:lstStyle/>
+          <a:p>
+            <a:pPr algn="ctr"/>
+          </a:p>
+        </p:txBody>
+      </p:sp>
+      <p:sp>
+        <p:nvSpPr>
+          <p:cNvPr id="21" name="TextBox 20"/>
           <p:cNvSpPr txBox="1"/>
           <p:nvPr/>
         </p:nvSpPr>
         <p:spPr>
           <a:xfrm>
-            <a:off x="16287750" y="3638550"/>
-            <a:ext cx="590550" cy="400050"/>
+            <a:off x="1428750" y="5762625"/>
+            <a:ext cx="419100" cy="304800"/>
           </a:xfrm>
           <a:prstGeom prst="rect">
             <a:avLst/>
@@ -11846,35 +12502,35 @@
           </a:bodyPr>
           <a:lstStyle/>
           <a:p>
-            <a:pPr algn="r">
+            <a:pPr algn="ctr">
               <a:lnSpc>
                 <a:spcPct val="100000"/>
               </a:lnSpc>
             </a:pPr>
             <a:r>
-              <a:rPr sz="2550" b="1">
-                <a:solidFill>
-                  <a:srgbClr val="E4EBF4"/>
-                </a:solidFill>
-                <a:latin typeface="Pretendard"/>
-                <a:ea typeface="Pretendard"/>
-                <a:cs typeface="Pretendard"/>
-              </a:rPr>
-              <a:t>04</a:t>
-            </a:r>
-          </a:p>
-        </p:txBody>
-      </p:sp>
-      <p:sp>
-        <p:nvSpPr>
-          <p:cNvPr id="23" name="TextBox 22"/>
+              <a:rPr sz="1875" b="1">
+                <a:solidFill>
+                  <a:srgbClr val="FFFFFF"/>
+                </a:solidFill>
+                <a:latin typeface="Pretendard"/>
+                <a:ea typeface="Pretendard"/>
+                <a:cs typeface="Pretendard"/>
+              </a:rPr>
+              <a:t>3</a:t>
+            </a:r>
+          </a:p>
+        </p:txBody>
+      </p:sp>
+      <p:sp>
+        <p:nvSpPr>
+          <p:cNvPr id="22" name="TextBox 21"/>
           <p:cNvSpPr txBox="1"/>
           <p:nvPr/>
         </p:nvSpPr>
         <p:spPr>
           <a:xfrm>
-            <a:off x="13754100" y="3752850"/>
-            <a:ext cx="3067050" cy="1828800"/>
+            <a:off x="2057400" y="5543550"/>
+            <a:ext cx="14763750" cy="723900"/>
           </a:xfrm>
           <a:prstGeom prst="rect">
             <a:avLst/>
@@ -11889,11 +12545,11 @@
           <a:p>
             <a:pPr>
               <a:lnSpc>
-                <a:spcPct val="115000"/>
-              </a:lnSpc>
-            </a:pPr>
-            <a:r>
-              <a:rPr sz="2700" b="1">
+                <a:spcPct val="120000"/>
+              </a:lnSpc>
+            </a:pPr>
+            <a:r>
+              <a:rPr sz="2175" b="1">
                 <a:solidFill>
                   <a:srgbClr val="0D2B5E"/>
                 </a:solidFill>
@@ -11901,20 +12557,20 @@
                 <a:ea typeface="Pretendard"/>
                 <a:cs typeface="Pretendard"/>
               </a:rPr>
-              <a:t>정리 0.5H</a:t>
+              <a:t>웹 UI 는 실무에서도 쓰나요?</a:t>
             </a:r>
           </a:p>
           <a:p>
             <a:pPr>
               <a:lnSpc>
-                <a:spcPct val="146000"/>
+                <a:spcPct val="130000"/>
               </a:lnSpc>
               <a:spcBef>
-                <a:spcPts val="1050"/>
+                <a:spcPts val="300"/>
               </a:spcBef>
             </a:pPr>
             <a:r>
-              <a:rPr sz="2025" b="0">
+              <a:rPr sz="1875" b="0">
                 <a:solidFill>
                   <a:srgbClr val="3D3D3D"/>
                 </a:solidFill>
@@ -11922,26 +12578,42 @@
                 <a:ea typeface="Pretendard"/>
                 <a:cs typeface="Pretendard"/>
               </a:rPr>
-              <a:t>정리·회고</a:t>
-            </a:r>
-          </a:p>
-          <a:p>
-            <a:pPr>
-              <a:lnSpc>
-                <a:spcPct val="146000"/>
-              </a:lnSpc>
-            </a:pPr>
-            <a:r>
-              <a:rPr sz="2025" b="0">
-                <a:solidFill>
-                  <a:srgbClr val="3D3D3D"/>
-                </a:solidFill>
-                <a:latin typeface="Pretendard"/>
-                <a:ea typeface="Pretendard"/>
-                <a:cs typeface="Pretendard"/>
-              </a:rPr>
-              <a:t>4주차 마무리</a:t>
-            </a:r>
+              <a:t>씁니다 — 느린 쿼리를 찾고 어느 단계가 오래 걸렸는지 보는 데</a:t>
+            </a:r>
+          </a:p>
+        </p:txBody>
+      </p:sp>
+      <p:sp>
+        <p:nvSpPr>
+          <p:cNvPr id="23" name="Rounded Rectangle 22"/>
+          <p:cNvSpPr/>
+          <p:nvPr/>
+        </p:nvSpPr>
+        <p:spPr>
+          <a:xfrm>
+            <a:off x="1143000" y="6496050"/>
+            <a:ext cx="16002000" cy="914400"/>
+          </a:xfrm>
+          <a:prstGeom prst="roundRect">
+            <a:avLst>
+              <a:gd name="adj" fmla="val 5208"/>
+            </a:avLst>
+          </a:prstGeom>
+          <a:solidFill>
+            <a:srgbClr val="FAFBFD"/>
+          </a:solidFill>
+          <a:ln w="9525">
+            <a:solidFill>
+              <a:srgbClr val="DCE1E8"/>
+            </a:solidFill>
+          </a:ln>
+          <a:effectLst/>
+        </p:spPr>
+        <p:txBody>
+          <a:bodyPr rtlCol="0" anchor="ctr" wrap="square"/>
+          <a:lstStyle/>
+          <a:p>
+            <a:pPr algn="ctr"/>
           </a:p>
         </p:txBody>
       </p:sp>
@@ -11954,7 +12626,7 @@
         <p:spPr>
           <a:xfrm>
             <a:off x="1143000" y="6496050"/>
-            <a:ext cx="47625" cy="723900"/>
+            <a:ext cx="47625" cy="914400"/>
           </a:xfrm>
           <a:prstGeom prst="rect">
             <a:avLst/>
@@ -11977,14 +12649,44 @@
       </p:sp>
       <p:sp>
         <p:nvSpPr>
-          <p:cNvPr id="25" name="TextBox 24"/>
+          <p:cNvPr id="25" name="Oval 24"/>
+          <p:cNvSpPr/>
+          <p:nvPr/>
+        </p:nvSpPr>
+        <p:spPr>
+          <a:xfrm>
+            <a:off x="1428750" y="6743700"/>
+            <a:ext cx="419100" cy="419100"/>
+          </a:xfrm>
+          <a:prstGeom prst="ellipse">
+            <a:avLst/>
+          </a:prstGeom>
+          <a:solidFill>
+            <a:srgbClr val="0D2B5E"/>
+          </a:solidFill>
+          <a:ln>
+            <a:noFill/>
+          </a:ln>
+          <a:effectLst/>
+        </p:spPr>
+        <p:txBody>
+          <a:bodyPr rtlCol="0" anchor="ctr" wrap="square"/>
+          <a:lstStyle/>
+          <a:p>
+            <a:pPr algn="ctr"/>
+          </a:p>
+        </p:txBody>
+      </p:sp>
+      <p:sp>
+        <p:nvSpPr>
+          <p:cNvPr id="26" name="TextBox 25"/>
           <p:cNvSpPr txBox="1"/>
           <p:nvPr/>
         </p:nvSpPr>
         <p:spPr>
           <a:xfrm>
-            <a:off x="1390650" y="6553200"/>
-            <a:ext cx="15754350" cy="762000"/>
+            <a:off x="1428750" y="6810375"/>
+            <a:ext cx="419100" cy="304800"/>
           </a:xfrm>
           <a:prstGeom prst="rect">
             <a:avLst/>
@@ -11997,28 +12699,90 @@
           </a:bodyPr>
           <a:lstStyle/>
           <a:p>
-            <a:pPr algn="l">
-              <a:lnSpc>
-                <a:spcPct val="150000"/>
-              </a:lnSpc>
-            </a:pPr>
-            <a:r>
-              <a:rPr sz="2025" b="1">
-                <a:solidFill>
-                  <a:srgbClr val="7D7D7D"/>
-                </a:solidFill>
-                <a:latin typeface="Pretendard"/>
-                <a:ea typeface="Pretendard"/>
-                <a:cs typeface="Pretendard"/>
-              </a:rPr>
-              <a:t>준비: 5개 컨테이너(minio·mc·rest·spark-iceberg·trino) 전부 Up · spark-sql 과 Trino CLI 에서 각각 1행씩 조회해 양쪽 연결 확인</a:t>
-            </a:r>
-          </a:p>
-        </p:txBody>
-      </p:sp>
-      <p:sp>
-        <p:nvSpPr>
-          <p:cNvPr id="26" name="Rectangle 25"/>
+            <a:pPr algn="ctr">
+              <a:lnSpc>
+                <a:spcPct val="100000"/>
+              </a:lnSpc>
+            </a:pPr>
+            <a:r>
+              <a:rPr sz="1875" b="1">
+                <a:solidFill>
+                  <a:srgbClr val="FFFFFF"/>
+                </a:solidFill>
+                <a:latin typeface="Pretendard"/>
+                <a:ea typeface="Pretendard"/>
+                <a:cs typeface="Pretendard"/>
+              </a:rPr>
+              <a:t>4</a:t>
+            </a:r>
+          </a:p>
+        </p:txBody>
+      </p:sp>
+      <p:sp>
+        <p:nvSpPr>
+          <p:cNvPr id="27" name="TextBox 26"/>
+          <p:cNvSpPr txBox="1"/>
+          <p:nvPr/>
+        </p:nvSpPr>
+        <p:spPr>
+          <a:xfrm>
+            <a:off x="2057400" y="6591300"/>
+            <a:ext cx="14763750" cy="723900"/>
+          </a:xfrm>
+          <a:prstGeom prst="rect">
+            <a:avLst/>
+          </a:prstGeom>
+          <a:noFill/>
+        </p:spPr>
+        <p:txBody>
+          <a:bodyPr wrap="square" lIns="0" rIns="0" tIns="0" bIns="0" anchor="ctr">
+            <a:spAutoFit/>
+          </a:bodyPr>
+          <a:lstStyle/>
+          <a:p>
+            <a:pPr>
+              <a:lnSpc>
+                <a:spcPct val="120000"/>
+              </a:lnSpc>
+            </a:pPr>
+            <a:r>
+              <a:rPr sz="2175" b="1">
+                <a:solidFill>
+                  <a:srgbClr val="0D2B5E"/>
+                </a:solidFill>
+                <a:latin typeface="Pretendard"/>
+                <a:ea typeface="Pretendard"/>
+                <a:cs typeface="Pretendard"/>
+              </a:rPr>
+              <a:t>카탈로그 파일을 고치면 재시작?</a:t>
+            </a:r>
+          </a:p>
+          <a:p>
+            <a:pPr>
+              <a:lnSpc>
+                <a:spcPct val="130000"/>
+              </a:lnSpc>
+              <a:spcBef>
+                <a:spcPts val="300"/>
+              </a:spcBef>
+            </a:pPr>
+            <a:r>
+              <a:rPr sz="1875" b="0">
+                <a:solidFill>
+                  <a:srgbClr val="3D3D3D"/>
+                </a:solidFill>
+                <a:latin typeface="Pretendard"/>
+                <a:ea typeface="Pretendard"/>
+                <a:cs typeface="Pretendard"/>
+              </a:rPr>
+              <a:t>네 — docker compose restart trino 로 다시 읽힙니다</a:t>
+            </a:r>
+          </a:p>
+        </p:txBody>
+      </p:sp>
+      <p:sp>
+        <p:nvSpPr>
+          <p:cNvPr id="28" name="Rectangle 27"/>
           <p:cNvSpPr/>
           <p:nvPr/>
         </p:nvSpPr>
@@ -12048,7 +12812,7 @@
       </p:sp>
       <p:sp>
         <p:nvSpPr>
-          <p:cNvPr id="27" name="TextBox 26"/>
+          <p:cNvPr id="29" name="TextBox 28"/>
           <p:cNvSpPr txBox="1"/>
           <p:nvPr/>
         </p:nvSpPr>
@@ -12089,7 +12853,7 @@
       </p:sp>
       <p:sp>
         <p:nvSpPr>
-          <p:cNvPr id="28" name="TextBox 27"/>
+          <p:cNvPr id="30" name="TextBox 29"/>
           <p:cNvSpPr txBox="1"/>
           <p:nvPr/>
         </p:nvSpPr>
@@ -12148,14 +12912,14 @@
       <p:grpSpPr/>
       <p:sp>
         <p:nvSpPr>
-          <p:cNvPr id="2" name="Oval 1"/>
-          <p:cNvSpPr/>
-          <p:nvPr/>
-        </p:nvSpPr>
-        <p:spPr>
-          <a:xfrm>
-            <a:off x="14859000" y="6667500"/>
-            <a:ext cx="5905500" cy="5905500"/>
+          <p:cNvPr id="2" name="deckgen:decor"/>
+          <p:cNvSpPr/>
+          <p:nvPr/>
+        </p:nvSpPr>
+        <p:spPr>
+          <a:xfrm>
+            <a:off x="15811500" y="8382000"/>
+            <a:ext cx="4953000" cy="4953000"/>
           </a:xfrm>
           <a:prstGeom prst="ellipse">
             <a:avLst/>
@@ -12178,20 +12942,20 @@
       </p:sp>
       <p:sp>
         <p:nvSpPr>
-          <p:cNvPr id="3" name="Oval 2"/>
-          <p:cNvSpPr/>
-          <p:nvPr/>
-        </p:nvSpPr>
-        <p:spPr>
-          <a:xfrm>
-            <a:off x="-2095500" y="-2095500"/>
-            <a:ext cx="4381500" cy="4381500"/>
+          <p:cNvPr id="3" name="deckgen:decor"/>
+          <p:cNvSpPr/>
+          <p:nvPr/>
+        </p:nvSpPr>
+        <p:spPr>
+          <a:xfrm>
+            <a:off x="16859250" y="9429750"/>
+            <a:ext cx="2857500" cy="2857500"/>
           </a:xfrm>
           <a:prstGeom prst="ellipse">
             <a:avLst/>
           </a:prstGeom>
           <a:solidFill>
-            <a:srgbClr val="F5F6F8"/>
+            <a:srgbClr val="FFFFFF"/>
           </a:solidFill>
           <a:ln>
             <a:noFill/>
@@ -12208,20 +12972,20 @@
       </p:sp>
       <p:sp>
         <p:nvSpPr>
-          <p:cNvPr id="4" name="Rectangle 3"/>
-          <p:cNvSpPr/>
-          <p:nvPr/>
-        </p:nvSpPr>
-        <p:spPr>
-          <a:xfrm>
-            <a:off x="1143000" y="2857500"/>
-            <a:ext cx="16002000" cy="28575"/>
-          </a:xfrm>
-          <a:prstGeom prst="rect">
-            <a:avLst/>
-          </a:prstGeom>
-          <a:solidFill>
-            <a:srgbClr val="0D2B5E"/>
+          <p:cNvPr id="4" name="deckgen:decor"/>
+          <p:cNvSpPr/>
+          <p:nvPr/>
+        </p:nvSpPr>
+        <p:spPr>
+          <a:xfrm>
+            <a:off x="-1428750" y="1428750"/>
+            <a:ext cx="2857500" cy="2857500"/>
+          </a:xfrm>
+          <a:prstGeom prst="ellipse">
+            <a:avLst/>
+          </a:prstGeom>
+          <a:solidFill>
+            <a:srgbClr val="F7F8FA"/>
           </a:solidFill>
           <a:ln>
             <a:noFill/>
@@ -12244,8 +13008,8 @@
         </p:nvSpPr>
         <p:spPr>
           <a:xfrm>
-            <a:off x="1143000" y="3352800"/>
-            <a:ext cx="8572500" cy="419100"/>
+            <a:off x="1143000" y="838200"/>
+            <a:ext cx="16002000" cy="342900"/>
           </a:xfrm>
           <a:prstGeom prst="rect">
             <a:avLst/>
@@ -12264,7 +13028,7 @@
               </a:lnSpc>
             </a:pPr>
             <a:r>
-              <a:rPr sz="2400" b="1">
+              <a:rPr sz="1950" b="1" spc="160">
                 <a:solidFill>
                   <a:srgbClr val="1E5BC6"/>
                 </a:solidFill>
@@ -12272,7 +13036,7 @@
                 <a:ea typeface="Pretendard"/>
                 <a:cs typeface="Pretendard"/>
               </a:rPr>
-              <a:t>4-4 · 정리·회고 0.5H 마무리</a:t>
+              <a:t>다음 회차 예고 · 10-22(목)</a:t>
             </a:r>
           </a:p>
         </p:txBody>
@@ -12285,8 +13049,8 @@
         </p:nvSpPr>
         <p:spPr>
           <a:xfrm>
-            <a:off x="1143000" y="3771900"/>
-            <a:ext cx="16002000" cy="800100"/>
+            <a:off x="1143000" y="1162050"/>
+            <a:ext cx="16002000" cy="762000"/>
           </a:xfrm>
           <a:prstGeom prst="rect">
             <a:avLst/>
@@ -12313,49 +13077,38 @@
                 <a:ea typeface="Pretendard"/>
                 <a:cs typeface="Pretendard"/>
               </a:rPr>
-              <a:t>다음 회차는 4-5 레이크하우스 통합</a:t>
-            </a:r>
-          </a:p>
-        </p:txBody>
-      </p:sp>
-      <p:sp>
-        <p:nvSpPr>
-          <p:cNvPr id="7" name="TextBox 6"/>
-          <p:cNvSpPr txBox="1"/>
-          <p:nvPr/>
-        </p:nvSpPr>
-        <p:spPr>
-          <a:xfrm>
-            <a:off x="1143000" y="4724400"/>
-            <a:ext cx="16002000" cy="438150"/>
-          </a:xfrm>
-          <a:prstGeom prst="rect">
-            <a:avLst/>
-          </a:prstGeom>
-          <a:noFill/>
-        </p:spPr>
-        <p:txBody>
-          <a:bodyPr wrap="square" lIns="0" rIns="0" tIns="0" bIns="0" anchor="t">
-            <a:spAutoFit/>
-          </a:bodyPr>
-          <a:lstStyle/>
-          <a:p>
-            <a:pPr algn="l">
-              <a:lnSpc>
-                <a:spcPct val="130000"/>
-              </a:lnSpc>
-            </a:pPr>
-            <a:r>
-              <a:rPr sz="2400" b="0">
-                <a:solidFill>
-                  <a:srgbClr val="3D3D3D"/>
-                </a:solidFill>
-                <a:latin typeface="Pretendard"/>
-                <a:ea typeface="Pretendard"/>
-                <a:cs typeface="Pretendard"/>
-              </a:rPr>
-              <a:t>카탈로그를 축으로 Spark·Trino 상호운용을 검증하고, 아키텍처 다이어그램과 Trino 쿼리 스크립트를 주차 산출물로 완성합니다</a:t>
-            </a:r>
+              <a:t>4-5 · 데이터 카탈로그 연결 및 레이크하우스 통합</a:t>
+            </a:r>
+          </a:p>
+        </p:txBody>
+      </p:sp>
+      <p:sp>
+        <p:nvSpPr>
+          <p:cNvPr id="7" name="Rectangle 6"/>
+          <p:cNvSpPr/>
+          <p:nvPr/>
+        </p:nvSpPr>
+        <p:spPr>
+          <a:xfrm>
+            <a:off x="1143000" y="2038350"/>
+            <a:ext cx="16002000" cy="28575"/>
+          </a:xfrm>
+          <a:prstGeom prst="rect">
+            <a:avLst/>
+          </a:prstGeom>
+          <a:solidFill>
+            <a:srgbClr val="0D2B5E"/>
+          </a:solidFill>
+          <a:ln>
+            <a:noFill/>
+          </a:ln>
+          <a:effectLst/>
+        </p:spPr>
+        <p:txBody>
+          <a:bodyPr rtlCol="0" anchor="ctr" wrap="square"/>
+          <a:lstStyle/>
+          <a:p>
+            <a:pPr algn="ctr"/>
           </a:p>
         </p:txBody>
       </p:sp>
@@ -12367,12 +13120,12 @@
         </p:nvSpPr>
         <p:spPr>
           <a:xfrm>
-            <a:off x="1143000" y="5257800"/>
-            <a:ext cx="7772400" cy="819150"/>
+            <a:off x="1143000" y="3429000"/>
+            <a:ext cx="3714750" cy="2476500"/>
           </a:xfrm>
           <a:prstGeom prst="roundRect">
             <a:avLst>
-              <a:gd name="adj" fmla="val 6976"/>
+              <a:gd name="adj" fmla="val 1923"/>
             </a:avLst>
           </a:prstGeom>
           <a:solidFill>
@@ -12395,14 +13148,44 @@
       </p:sp>
       <p:sp>
         <p:nvSpPr>
-          <p:cNvPr id="9" name="TextBox 8"/>
+          <p:cNvPr id="9" name="Rectangle 8"/>
+          <p:cNvSpPr/>
+          <p:nvPr/>
+        </p:nvSpPr>
+        <p:spPr>
+          <a:xfrm>
+            <a:off x="1143000" y="3429000"/>
+            <a:ext cx="3714750" cy="47625"/>
+          </a:xfrm>
+          <a:prstGeom prst="rect">
+            <a:avLst/>
+          </a:prstGeom>
+          <a:solidFill>
+            <a:srgbClr val="1E5BC6"/>
+          </a:solidFill>
+          <a:ln>
+            <a:noFill/>
+          </a:ln>
+          <a:effectLst/>
+        </p:spPr>
+        <p:txBody>
+          <a:bodyPr rtlCol="0" anchor="ctr" wrap="square"/>
+          <a:lstStyle/>
+          <a:p>
+            <a:pPr algn="ctr"/>
+          </a:p>
+        </p:txBody>
+      </p:sp>
+      <p:sp>
+        <p:nvSpPr>
+          <p:cNvPr id="10" name="deckgen:ornament"/>
           <p:cNvSpPr txBox="1"/>
           <p:nvPr/>
         </p:nvSpPr>
         <p:spPr>
           <a:xfrm>
-            <a:off x="1428750" y="5486400"/>
-            <a:ext cx="419100" cy="381000"/>
+            <a:off x="4000500" y="3638550"/>
+            <a:ext cx="590550" cy="400050"/>
           </a:xfrm>
           <a:prstGeom prst="rect">
             <a:avLst/>
@@ -12415,35 +13198,179 @@
           </a:bodyPr>
           <a:lstStyle/>
           <a:p>
-            <a:pPr algn="l">
+            <a:pPr algn="r">
               <a:lnSpc>
                 <a:spcPct val="100000"/>
               </a:lnSpc>
             </a:pPr>
             <a:r>
-              <a:rPr sz="2475" b="1">
-                <a:solidFill>
-                  <a:srgbClr val="1E5BC6"/>
-                </a:solidFill>
-                <a:latin typeface="Pretendard"/>
-                <a:ea typeface="Pretendard"/>
-                <a:cs typeface="Pretendard"/>
-              </a:rPr>
-              <a:t>✓</a:t>
-            </a:r>
-          </a:p>
-        </p:txBody>
-      </p:sp>
-      <p:sp>
-        <p:nvSpPr>
-          <p:cNvPr id="10" name="TextBox 9"/>
+              <a:rPr sz="2550" b="1">
+                <a:solidFill>
+                  <a:srgbClr val="E4EBF4"/>
+                </a:solidFill>
+                <a:latin typeface="Pretendard"/>
+                <a:ea typeface="Pretendard"/>
+                <a:cs typeface="Pretendard"/>
+              </a:rPr>
+              <a:t>01</a:t>
+            </a:r>
+          </a:p>
+        </p:txBody>
+      </p:sp>
+      <p:sp>
+        <p:nvSpPr>
+          <p:cNvPr id="11" name="TextBox 10"/>
           <p:cNvSpPr txBox="1"/>
           <p:nvPr/>
         </p:nvSpPr>
         <p:spPr>
           <a:xfrm>
-            <a:off x="1905000" y="5486400"/>
-            <a:ext cx="6724650" cy="381000"/>
+            <a:off x="1466850" y="3752850"/>
+            <a:ext cx="3067050" cy="1828800"/>
+          </a:xfrm>
+          <a:prstGeom prst="rect">
+            <a:avLst/>
+          </a:prstGeom>
+          <a:noFill/>
+        </p:spPr>
+        <p:txBody>
+          <a:bodyPr wrap="square" lIns="0" rIns="0" tIns="0" bIns="0" anchor="ctr">
+            <a:spAutoFit/>
+          </a:bodyPr>
+          <a:lstStyle/>
+          <a:p>
+            <a:pPr>
+              <a:lnSpc>
+                <a:spcPct val="115000"/>
+              </a:lnSpc>
+            </a:pPr>
+            <a:r>
+              <a:rPr sz="2700" b="1">
+                <a:solidFill>
+                  <a:srgbClr val="0D2B5E"/>
+                </a:solidFill>
+                <a:latin typeface="Pretendard"/>
+                <a:ea typeface="Pretendard"/>
+                <a:cs typeface="Pretendard"/>
+              </a:rPr>
+              <a:t>이론 1H</a:t>
+            </a:r>
+          </a:p>
+          <a:p>
+            <a:pPr>
+              <a:lnSpc>
+                <a:spcPct val="146000"/>
+              </a:lnSpc>
+              <a:spcBef>
+                <a:spcPts val="1050"/>
+              </a:spcBef>
+            </a:pPr>
+            <a:r>
+              <a:rPr sz="2025" b="0">
+                <a:solidFill>
+                  <a:srgbClr val="3D3D3D"/>
+                </a:solidFill>
+                <a:latin typeface="Pretendard"/>
+                <a:ea typeface="Pretendard"/>
+                <a:cs typeface="Pretendard"/>
+              </a:rPr>
+              <a:t>데이터 카탈로그의</a:t>
+            </a:r>
+          </a:p>
+          <a:p>
+            <a:pPr>
+              <a:lnSpc>
+                <a:spcPct val="146000"/>
+              </a:lnSpc>
+            </a:pPr>
+            <a:r>
+              <a:rPr sz="2025" b="0">
+                <a:solidFill>
+                  <a:srgbClr val="3D3D3D"/>
+                </a:solidFill>
+                <a:latin typeface="Pretendard"/>
+                <a:ea typeface="Pretendard"/>
+                <a:cs typeface="Pretendard"/>
+              </a:rPr>
+              <a:t>역할</a:t>
+            </a:r>
+          </a:p>
+        </p:txBody>
+      </p:sp>
+      <p:sp>
+        <p:nvSpPr>
+          <p:cNvPr id="12" name="Rounded Rectangle 11"/>
+          <p:cNvSpPr/>
+          <p:nvPr/>
+        </p:nvSpPr>
+        <p:spPr>
+          <a:xfrm>
+            <a:off x="5238750" y="3429000"/>
+            <a:ext cx="3714750" cy="2476500"/>
+          </a:xfrm>
+          <a:prstGeom prst="roundRect">
+            <a:avLst>
+              <a:gd name="adj" fmla="val 1923"/>
+            </a:avLst>
+          </a:prstGeom>
+          <a:solidFill>
+            <a:srgbClr val="0D2B5E"/>
+          </a:solidFill>
+          <a:ln w="9525">
+            <a:solidFill>
+              <a:srgbClr val="0D2B5E"/>
+            </a:solidFill>
+          </a:ln>
+          <a:effectLst/>
+        </p:spPr>
+        <p:txBody>
+          <a:bodyPr rtlCol="0" anchor="ctr" wrap="square"/>
+          <a:lstStyle/>
+          <a:p>
+            <a:pPr algn="ctr"/>
+          </a:p>
+        </p:txBody>
+      </p:sp>
+      <p:sp>
+        <p:nvSpPr>
+          <p:cNvPr id="13" name="Rectangle 12"/>
+          <p:cNvSpPr/>
+          <p:nvPr/>
+        </p:nvSpPr>
+        <p:spPr>
+          <a:xfrm>
+            <a:off x="5238750" y="3429000"/>
+            <a:ext cx="3714750" cy="47625"/>
+          </a:xfrm>
+          <a:prstGeom prst="rect">
+            <a:avLst/>
+          </a:prstGeom>
+          <a:solidFill>
+            <a:srgbClr val="1E5BC6"/>
+          </a:solidFill>
+          <a:ln>
+            <a:noFill/>
+          </a:ln>
+          <a:effectLst/>
+        </p:spPr>
+        <p:txBody>
+          <a:bodyPr rtlCol="0" anchor="ctr" wrap="square"/>
+          <a:lstStyle/>
+          <a:p>
+            <a:pPr algn="ctr"/>
+          </a:p>
+        </p:txBody>
+      </p:sp>
+      <p:sp>
+        <p:nvSpPr>
+          <p:cNvPr id="14" name="deckgen:ornament"/>
+          <p:cNvSpPr txBox="1"/>
+          <p:nvPr/>
+        </p:nvSpPr>
+        <p:spPr>
+          <a:xfrm>
+            <a:off x="8096250" y="3638550"/>
+            <a:ext cx="590550" cy="400050"/>
           </a:xfrm>
           <a:prstGeom prst="rect">
             <a:avLst/>
@@ -12456,39 +13383,119 @@
           </a:bodyPr>
           <a:lstStyle/>
           <a:p>
-            <a:pPr algn="l">
+            <a:pPr algn="r">
               <a:lnSpc>
                 <a:spcPct val="100000"/>
               </a:lnSpc>
             </a:pPr>
             <a:r>
-              <a:rPr sz="2475" b="1">
-                <a:solidFill>
-                  <a:srgbClr val="0D2B5E"/>
-                </a:solidFill>
-                <a:latin typeface="Pretendard"/>
-                <a:ea typeface="Pretendard"/>
-                <a:cs typeface="Pretendard"/>
-              </a:rPr>
-              <a:t>카탈로그가 단일 진실 원천인 이유</a:t>
-            </a:r>
-          </a:p>
-        </p:txBody>
-      </p:sp>
-      <p:sp>
-        <p:nvSpPr>
-          <p:cNvPr id="11" name="Rounded Rectangle 10"/>
-          <p:cNvSpPr/>
-          <p:nvPr/>
-        </p:nvSpPr>
-        <p:spPr>
-          <a:xfrm>
-            <a:off x="9372600" y="5257800"/>
-            <a:ext cx="7772400" cy="819150"/>
+              <a:rPr sz="2550" b="1">
+                <a:solidFill>
+                  <a:srgbClr val="3B4B7C"/>
+                </a:solidFill>
+                <a:latin typeface="Pretendard"/>
+                <a:ea typeface="Pretendard"/>
+                <a:cs typeface="Pretendard"/>
+              </a:rPr>
+              <a:t>02</a:t>
+            </a:r>
+          </a:p>
+        </p:txBody>
+      </p:sp>
+      <p:sp>
+        <p:nvSpPr>
+          <p:cNvPr id="15" name="TextBox 14"/>
+          <p:cNvSpPr txBox="1"/>
+          <p:nvPr/>
+        </p:nvSpPr>
+        <p:spPr>
+          <a:xfrm>
+            <a:off x="5562600" y="3752850"/>
+            <a:ext cx="3067050" cy="1828800"/>
+          </a:xfrm>
+          <a:prstGeom prst="rect">
+            <a:avLst/>
+          </a:prstGeom>
+          <a:noFill/>
+        </p:spPr>
+        <p:txBody>
+          <a:bodyPr wrap="square" lIns="0" rIns="0" tIns="0" bIns="0" anchor="ctr">
+            <a:spAutoFit/>
+          </a:bodyPr>
+          <a:lstStyle/>
+          <a:p>
+            <a:pPr>
+              <a:lnSpc>
+                <a:spcPct val="115000"/>
+              </a:lnSpc>
+            </a:pPr>
+            <a:r>
+              <a:rPr sz="2700" b="1">
+                <a:solidFill>
+                  <a:srgbClr val="FFFFFF"/>
+                </a:solidFill>
+                <a:latin typeface="Pretendard"/>
+                <a:ea typeface="Pretendard"/>
+                <a:cs typeface="Pretendard"/>
+              </a:rPr>
+              <a:t>실습 1.5H</a:t>
+            </a:r>
+          </a:p>
+          <a:p>
+            <a:pPr>
+              <a:lnSpc>
+                <a:spcPct val="146000"/>
+              </a:lnSpc>
+              <a:spcBef>
+                <a:spcPts val="1050"/>
+              </a:spcBef>
+            </a:pPr>
+            <a:r>
+              <a:rPr sz="2025" b="0">
+                <a:solidFill>
+                  <a:srgbClr val="D9E2F0"/>
+                </a:solidFill>
+                <a:latin typeface="Pretendard"/>
+                <a:ea typeface="Pretendard"/>
+                <a:cs typeface="Pretendard"/>
+              </a:rPr>
+              <a:t>Spark–Trino</a:t>
+            </a:r>
+          </a:p>
+          <a:p>
+            <a:pPr>
+              <a:lnSpc>
+                <a:spcPct val="146000"/>
+              </a:lnSpc>
+            </a:pPr>
+            <a:r>
+              <a:rPr sz="2025" b="0">
+                <a:solidFill>
+                  <a:srgbClr val="D9E2F0"/>
+                </a:solidFill>
+                <a:latin typeface="Pretendard"/>
+                <a:ea typeface="Pretendard"/>
+                <a:cs typeface="Pretendard"/>
+              </a:rPr>
+              <a:t>상호운용 검증</a:t>
+            </a:r>
+          </a:p>
+        </p:txBody>
+      </p:sp>
+      <p:sp>
+        <p:nvSpPr>
+          <p:cNvPr id="16" name="Rounded Rectangle 15"/>
+          <p:cNvSpPr/>
+          <p:nvPr/>
+        </p:nvSpPr>
+        <p:spPr>
+          <a:xfrm>
+            <a:off x="9334500" y="3429000"/>
+            <a:ext cx="3714750" cy="2476500"/>
           </a:xfrm>
           <a:prstGeom prst="roundRect">
             <a:avLst>
-              <a:gd name="adj" fmla="val 6976"/>
+              <a:gd name="adj" fmla="val 1923"/>
             </a:avLst>
           </a:prstGeom>
           <a:solidFill>
@@ -12511,14 +13518,44 @@
       </p:sp>
       <p:sp>
         <p:nvSpPr>
-          <p:cNvPr id="12" name="TextBox 11"/>
+          <p:cNvPr id="17" name="Rectangle 16"/>
+          <p:cNvSpPr/>
+          <p:nvPr/>
+        </p:nvSpPr>
+        <p:spPr>
+          <a:xfrm>
+            <a:off x="9334500" y="3429000"/>
+            <a:ext cx="3714750" cy="47625"/>
+          </a:xfrm>
+          <a:prstGeom prst="rect">
+            <a:avLst/>
+          </a:prstGeom>
+          <a:solidFill>
+            <a:srgbClr val="1E5BC6"/>
+          </a:solidFill>
+          <a:ln>
+            <a:noFill/>
+          </a:ln>
+          <a:effectLst/>
+        </p:spPr>
+        <p:txBody>
+          <a:bodyPr rtlCol="0" anchor="ctr" wrap="square"/>
+          <a:lstStyle/>
+          <a:p>
+            <a:pPr algn="ctr"/>
+          </a:p>
+        </p:txBody>
+      </p:sp>
+      <p:sp>
+        <p:nvSpPr>
+          <p:cNvPr id="18" name="deckgen:ornament"/>
           <p:cNvSpPr txBox="1"/>
           <p:nvPr/>
         </p:nvSpPr>
         <p:spPr>
           <a:xfrm>
-            <a:off x="9658350" y="5486400"/>
-            <a:ext cx="419100" cy="381000"/>
+            <a:off x="12192000" y="3638550"/>
+            <a:ext cx="590550" cy="400050"/>
           </a:xfrm>
           <a:prstGeom prst="rect">
             <a:avLst/>
@@ -12531,35 +13568,35 @@
           </a:bodyPr>
           <a:lstStyle/>
           <a:p>
-            <a:pPr algn="l">
+            <a:pPr algn="r">
               <a:lnSpc>
                 <a:spcPct val="100000"/>
               </a:lnSpc>
             </a:pPr>
             <a:r>
-              <a:rPr sz="2475" b="1">
-                <a:solidFill>
-                  <a:srgbClr val="1E5BC6"/>
-                </a:solidFill>
-                <a:latin typeface="Pretendard"/>
-                <a:ea typeface="Pretendard"/>
-                <a:cs typeface="Pretendard"/>
-              </a:rPr>
-              <a:t>✓</a:t>
-            </a:r>
-          </a:p>
-        </p:txBody>
-      </p:sp>
-      <p:sp>
-        <p:nvSpPr>
-          <p:cNvPr id="13" name="TextBox 12"/>
+              <a:rPr sz="2550" b="1">
+                <a:solidFill>
+                  <a:srgbClr val="E4EBF4"/>
+                </a:solidFill>
+                <a:latin typeface="Pretendard"/>
+                <a:ea typeface="Pretendard"/>
+                <a:cs typeface="Pretendard"/>
+              </a:rPr>
+              <a:t>03</a:t>
+            </a:r>
+          </a:p>
+        </p:txBody>
+      </p:sp>
+      <p:sp>
+        <p:nvSpPr>
+          <p:cNvPr id="19" name="TextBox 18"/>
           <p:cNvSpPr txBox="1"/>
           <p:nvPr/>
         </p:nvSpPr>
         <p:spPr>
           <a:xfrm>
-            <a:off x="10134600" y="5486400"/>
-            <a:ext cx="6724650" cy="381000"/>
+            <a:off x="9658350" y="3752850"/>
+            <a:ext cx="3067050" cy="1828800"/>
           </a:xfrm>
           <a:prstGeom prst="rect">
             <a:avLst/>
@@ -12567,18 +13604,18 @@
           <a:noFill/>
         </p:spPr>
         <p:txBody>
-          <a:bodyPr wrap="square" lIns="0" rIns="0" tIns="0" bIns="0" anchor="t">
+          <a:bodyPr wrap="square" lIns="0" rIns="0" tIns="0" bIns="0" anchor="ctr">
             <a:spAutoFit/>
           </a:bodyPr>
           <a:lstStyle/>
           <a:p>
-            <a:pPr algn="l">
-              <a:lnSpc>
-                <a:spcPct val="100000"/>
-              </a:lnSpc>
-            </a:pPr>
-            <a:r>
-              <a:rPr sz="2475" b="1">
+            <a:pPr>
+              <a:lnSpc>
+                <a:spcPct val="115000"/>
+              </a:lnSpc>
+            </a:pPr>
+            <a:r>
+              <a:rPr sz="2700" b="1">
                 <a:solidFill>
                   <a:srgbClr val="0D2B5E"/>
                 </a:solidFill>
@@ -12586,25 +13623,64 @@
                 <a:ea typeface="Pretendard"/>
                 <a:cs typeface="Pretendard"/>
               </a:rPr>
-              <a:t>REST 카탈로그·Hive Metastore·AWS Glue 비교</a:t>
-            </a:r>
-          </a:p>
-        </p:txBody>
-      </p:sp>
-      <p:sp>
-        <p:nvSpPr>
-          <p:cNvPr id="14" name="Rounded Rectangle 13"/>
-          <p:cNvSpPr/>
-          <p:nvPr/>
-        </p:nvSpPr>
-        <p:spPr>
-          <a:xfrm>
-            <a:off x="1143000" y="6286500"/>
-            <a:ext cx="7772400" cy="819150"/>
+              <a:t>실습 1H</a:t>
+            </a:r>
+          </a:p>
+          <a:p>
+            <a:pPr>
+              <a:lnSpc>
+                <a:spcPct val="146000"/>
+              </a:lnSpc>
+              <a:spcBef>
+                <a:spcPts val="1050"/>
+              </a:spcBef>
+            </a:pPr>
+            <a:r>
+              <a:rPr sz="2025" b="0">
+                <a:solidFill>
+                  <a:srgbClr val="3D3D3D"/>
+                </a:solidFill>
+                <a:latin typeface="Pretendard"/>
+                <a:ea typeface="Pretendard"/>
+                <a:cs typeface="Pretendard"/>
+              </a:rPr>
+              <a:t>레이크하우스</a:t>
+            </a:r>
+          </a:p>
+          <a:p>
+            <a:pPr>
+              <a:lnSpc>
+                <a:spcPct val="146000"/>
+              </a:lnSpc>
+            </a:pPr>
+            <a:r>
+              <a:rPr sz="2025" b="0">
+                <a:solidFill>
+                  <a:srgbClr val="3D3D3D"/>
+                </a:solidFill>
+                <a:latin typeface="Pretendard"/>
+                <a:ea typeface="Pretendard"/>
+                <a:cs typeface="Pretendard"/>
+              </a:rPr>
+              <a:t>통합 산출물</a:t>
+            </a:r>
+          </a:p>
+        </p:txBody>
+      </p:sp>
+      <p:sp>
+        <p:nvSpPr>
+          <p:cNvPr id="20" name="Rounded Rectangle 19"/>
+          <p:cNvSpPr/>
+          <p:nvPr/>
+        </p:nvSpPr>
+        <p:spPr>
+          <a:xfrm>
+            <a:off x="13430250" y="3429000"/>
+            <a:ext cx="3714750" cy="2476500"/>
           </a:xfrm>
           <a:prstGeom prst="roundRect">
             <a:avLst>
-              <a:gd name="adj" fmla="val 6976"/>
+              <a:gd name="adj" fmla="val 1923"/>
             </a:avLst>
           </a:prstGeom>
           <a:solidFill>
@@ -12627,14 +13703,44 @@
       </p:sp>
       <p:sp>
         <p:nvSpPr>
-          <p:cNvPr id="15" name="TextBox 14"/>
+          <p:cNvPr id="21" name="Rectangle 20"/>
+          <p:cNvSpPr/>
+          <p:nvPr/>
+        </p:nvSpPr>
+        <p:spPr>
+          <a:xfrm>
+            <a:off x="13430250" y="3429000"/>
+            <a:ext cx="3714750" cy="47625"/>
+          </a:xfrm>
+          <a:prstGeom prst="rect">
+            <a:avLst/>
+          </a:prstGeom>
+          <a:solidFill>
+            <a:srgbClr val="1E5BC6"/>
+          </a:solidFill>
+          <a:ln>
+            <a:noFill/>
+          </a:ln>
+          <a:effectLst/>
+        </p:spPr>
+        <p:txBody>
+          <a:bodyPr rtlCol="0" anchor="ctr" wrap="square"/>
+          <a:lstStyle/>
+          <a:p>
+            <a:pPr algn="ctr"/>
+          </a:p>
+        </p:txBody>
+      </p:sp>
+      <p:sp>
+        <p:nvSpPr>
+          <p:cNvPr id="22" name="deckgen:ornament"/>
           <p:cNvSpPr txBox="1"/>
           <p:nvPr/>
         </p:nvSpPr>
         <p:spPr>
           <a:xfrm>
-            <a:off x="1428750" y="6515100"/>
-            <a:ext cx="419100" cy="381000"/>
+            <a:off x="16287750" y="3638550"/>
+            <a:ext cx="590550" cy="400050"/>
           </a:xfrm>
           <a:prstGeom prst="rect">
             <a:avLst/>
@@ -12647,35 +13753,145 @@
           </a:bodyPr>
           <a:lstStyle/>
           <a:p>
-            <a:pPr algn="l">
+            <a:pPr algn="r">
               <a:lnSpc>
                 <a:spcPct val="100000"/>
               </a:lnSpc>
             </a:pPr>
             <a:r>
-              <a:rPr sz="2475" b="1">
-                <a:solidFill>
-                  <a:srgbClr val="1E5BC6"/>
-                </a:solidFill>
-                <a:latin typeface="Pretendard"/>
-                <a:ea typeface="Pretendard"/>
-                <a:cs typeface="Pretendard"/>
-              </a:rPr>
-              <a:t>✓</a:t>
-            </a:r>
-          </a:p>
-        </p:txBody>
-      </p:sp>
-      <p:sp>
-        <p:nvSpPr>
-          <p:cNvPr id="16" name="TextBox 15"/>
+              <a:rPr sz="2550" b="1">
+                <a:solidFill>
+                  <a:srgbClr val="E4EBF4"/>
+                </a:solidFill>
+                <a:latin typeface="Pretendard"/>
+                <a:ea typeface="Pretendard"/>
+                <a:cs typeface="Pretendard"/>
+              </a:rPr>
+              <a:t>04</a:t>
+            </a:r>
+          </a:p>
+        </p:txBody>
+      </p:sp>
+      <p:sp>
+        <p:nvSpPr>
+          <p:cNvPr id="23" name="TextBox 22"/>
           <p:cNvSpPr txBox="1"/>
           <p:nvPr/>
         </p:nvSpPr>
         <p:spPr>
           <a:xfrm>
-            <a:off x="1905000" y="6515100"/>
-            <a:ext cx="6724650" cy="381000"/>
+            <a:off x="13754100" y="3752850"/>
+            <a:ext cx="3067050" cy="1828800"/>
+          </a:xfrm>
+          <a:prstGeom prst="rect">
+            <a:avLst/>
+          </a:prstGeom>
+          <a:noFill/>
+        </p:spPr>
+        <p:txBody>
+          <a:bodyPr wrap="square" lIns="0" rIns="0" tIns="0" bIns="0" anchor="ctr">
+            <a:spAutoFit/>
+          </a:bodyPr>
+          <a:lstStyle/>
+          <a:p>
+            <a:pPr>
+              <a:lnSpc>
+                <a:spcPct val="115000"/>
+              </a:lnSpc>
+            </a:pPr>
+            <a:r>
+              <a:rPr sz="2700" b="1">
+                <a:solidFill>
+                  <a:srgbClr val="0D2B5E"/>
+                </a:solidFill>
+                <a:latin typeface="Pretendard"/>
+                <a:ea typeface="Pretendard"/>
+                <a:cs typeface="Pretendard"/>
+              </a:rPr>
+              <a:t>정리 0.5H</a:t>
+            </a:r>
+          </a:p>
+          <a:p>
+            <a:pPr>
+              <a:lnSpc>
+                <a:spcPct val="146000"/>
+              </a:lnSpc>
+              <a:spcBef>
+                <a:spcPts val="1050"/>
+              </a:spcBef>
+            </a:pPr>
+            <a:r>
+              <a:rPr sz="2025" b="0">
+                <a:solidFill>
+                  <a:srgbClr val="3D3D3D"/>
+                </a:solidFill>
+                <a:latin typeface="Pretendard"/>
+                <a:ea typeface="Pretendard"/>
+                <a:cs typeface="Pretendard"/>
+              </a:rPr>
+              <a:t>정리·회고</a:t>
+            </a:r>
+          </a:p>
+          <a:p>
+            <a:pPr>
+              <a:lnSpc>
+                <a:spcPct val="146000"/>
+              </a:lnSpc>
+            </a:pPr>
+            <a:r>
+              <a:rPr sz="2025" b="0">
+                <a:solidFill>
+                  <a:srgbClr val="3D3D3D"/>
+                </a:solidFill>
+                <a:latin typeface="Pretendard"/>
+                <a:ea typeface="Pretendard"/>
+                <a:cs typeface="Pretendard"/>
+              </a:rPr>
+              <a:t>4주차 마무리</a:t>
+            </a:r>
+          </a:p>
+        </p:txBody>
+      </p:sp>
+      <p:sp>
+        <p:nvSpPr>
+          <p:cNvPr id="24" name="Rectangle 23"/>
+          <p:cNvSpPr/>
+          <p:nvPr/>
+        </p:nvSpPr>
+        <p:spPr>
+          <a:xfrm>
+            <a:off x="1143000" y="6496050"/>
+            <a:ext cx="47625" cy="723900"/>
+          </a:xfrm>
+          <a:prstGeom prst="rect">
+            <a:avLst/>
+          </a:prstGeom>
+          <a:solidFill>
+            <a:srgbClr val="1E5BC6"/>
+          </a:solidFill>
+          <a:ln>
+            <a:noFill/>
+          </a:ln>
+          <a:effectLst/>
+        </p:spPr>
+        <p:txBody>
+          <a:bodyPr rtlCol="0" anchor="ctr" wrap="square"/>
+          <a:lstStyle/>
+          <a:p>
+            <a:pPr algn="ctr"/>
+          </a:p>
+        </p:txBody>
+      </p:sp>
+      <p:sp>
+        <p:nvSpPr>
+          <p:cNvPr id="25" name="TextBox 24"/>
+          <p:cNvSpPr txBox="1"/>
+          <p:nvPr/>
+        </p:nvSpPr>
+        <p:spPr>
+          <a:xfrm>
+            <a:off x="1390650" y="6553200"/>
+            <a:ext cx="15754350" cy="762000"/>
           </a:xfrm>
           <a:prstGeom prst="rect">
             <a:avLst/>
@@ -12690,67 +13906,63 @@
           <a:p>
             <a:pPr algn="l">
               <a:lnSpc>
-                <a:spcPct val="100000"/>
-              </a:lnSpc>
-            </a:pPr>
-            <a:r>
-              <a:rPr sz="2475" b="1">
-                <a:solidFill>
-                  <a:srgbClr val="0D2B5E"/>
-                </a:solidFill>
-                <a:latin typeface="Pretendard"/>
-                <a:ea typeface="Pretendard"/>
-                <a:cs typeface="Pretendard"/>
-              </a:rPr>
-              <a:t>같은 카탈로그로 읽고 쓰는 것을 검증</a:t>
-            </a:r>
-          </a:p>
-        </p:txBody>
-      </p:sp>
-      <p:sp>
-        <p:nvSpPr>
-          <p:cNvPr id="17" name="Rounded Rectangle 16"/>
-          <p:cNvSpPr/>
-          <p:nvPr/>
-        </p:nvSpPr>
-        <p:spPr>
-          <a:xfrm>
-            <a:off x="9372600" y="6286500"/>
-            <a:ext cx="7772400" cy="819150"/>
-          </a:xfrm>
-          <a:prstGeom prst="roundRect">
-            <a:avLst>
-              <a:gd name="adj" fmla="val 6976"/>
-            </a:avLst>
-          </a:prstGeom>
-          <a:solidFill>
-            <a:srgbClr val="FAFBFD"/>
-          </a:solidFill>
-          <a:ln w="9525">
-            <a:solidFill>
-              <a:srgbClr val="DCE1E8"/>
-            </a:solidFill>
-          </a:ln>
-          <a:effectLst/>
-        </p:spPr>
-        <p:txBody>
-          <a:bodyPr rtlCol="0" anchor="ctr" wrap="square"/>
-          <a:lstStyle/>
-          <a:p>
-            <a:pPr algn="ctr"/>
-          </a:p>
-        </p:txBody>
-      </p:sp>
-      <p:sp>
-        <p:nvSpPr>
-          <p:cNvPr id="18" name="TextBox 17"/>
+                <a:spcPct val="150000"/>
+              </a:lnSpc>
+            </a:pPr>
+            <a:r>
+              <a:rPr sz="2025" b="1">
+                <a:solidFill>
+                  <a:srgbClr val="7D7D7D"/>
+                </a:solidFill>
+                <a:latin typeface="Pretendard"/>
+                <a:ea typeface="Pretendard"/>
+                <a:cs typeface="Pretendard"/>
+              </a:rPr>
+              <a:t>준비: 5개 컨테이너(minio·mc·rest·spark-iceberg·trino) 전부 Up · spark-sql 과 Trino CLI 에서 각각 1행씩 조회해 양쪽 연결 확인</a:t>
+            </a:r>
+          </a:p>
+        </p:txBody>
+      </p:sp>
+      <p:sp>
+        <p:nvSpPr>
+          <p:cNvPr id="26" name="Rectangle 25"/>
+          <p:cNvSpPr/>
+          <p:nvPr/>
+        </p:nvSpPr>
+        <p:spPr>
+          <a:xfrm>
+            <a:off x="1143000" y="8058150"/>
+            <a:ext cx="16002000" cy="9525"/>
+          </a:xfrm>
+          <a:prstGeom prst="rect">
+            <a:avLst/>
+          </a:prstGeom>
+          <a:solidFill>
+            <a:srgbClr val="DCE1E8"/>
+          </a:solidFill>
+          <a:ln>
+            <a:noFill/>
+          </a:ln>
+          <a:effectLst/>
+        </p:spPr>
+        <p:txBody>
+          <a:bodyPr rtlCol="0" anchor="ctr" wrap="square"/>
+          <a:lstStyle/>
+          <a:p>
+            <a:pPr algn="ctr"/>
+          </a:p>
+        </p:txBody>
+      </p:sp>
+      <p:sp>
+        <p:nvSpPr>
+          <p:cNvPr id="27" name="TextBox 26"/>
           <p:cNvSpPr txBox="1"/>
           <p:nvPr/>
         </p:nvSpPr>
         <p:spPr>
           <a:xfrm>
-            <a:off x="9658350" y="6515100"/>
-            <a:ext cx="419100" cy="381000"/>
+            <a:off x="1143000" y="8248650"/>
+            <a:ext cx="13335000" cy="323850"/>
           </a:xfrm>
           <a:prstGeom prst="rect">
             <a:avLst/>
@@ -12769,29 +13981,29 @@
               </a:lnSpc>
             </a:pPr>
             <a:r>
-              <a:rPr sz="2475" b="1">
-                <a:solidFill>
-                  <a:srgbClr val="1E5BC6"/>
-                </a:solidFill>
-                <a:latin typeface="Pretendard"/>
-                <a:ea typeface="Pretendard"/>
-                <a:cs typeface="Pretendard"/>
-              </a:rPr>
-              <a:t>✓</a:t>
-            </a:r>
-          </a:p>
-        </p:txBody>
-      </p:sp>
-      <p:sp>
-        <p:nvSpPr>
-          <p:cNvPr id="19" name="TextBox 18"/>
+              <a:rPr sz="1725" b="0">
+                <a:solidFill>
+                  <a:srgbClr val="7D7D7D"/>
+                </a:solidFill>
+                <a:latin typeface="Pretendard"/>
+                <a:ea typeface="Pretendard"/>
+                <a:cs typeface="Pretendard"/>
+              </a:rPr>
+              <a:t>데이터 엔지니어링 &amp; RAG 파이프라인 160H · 4-4 · 정리·회고 0.5H</a:t>
+            </a:r>
+          </a:p>
+        </p:txBody>
+      </p:sp>
+      <p:sp>
+        <p:nvSpPr>
+          <p:cNvPr id="28" name="TextBox 27"/>
           <p:cNvSpPr txBox="1"/>
           <p:nvPr/>
         </p:nvSpPr>
         <p:spPr>
           <a:xfrm>
-            <a:off x="10134600" y="6515100"/>
-            <a:ext cx="6724650" cy="381000"/>
+            <a:off x="15240000" y="8248650"/>
+            <a:ext cx="1905000" cy="323850"/>
           </a:xfrm>
           <a:prstGeom prst="rect">
             <a:avLst/>
@@ -12804,133 +14016,21 @@
           </a:bodyPr>
           <a:lstStyle/>
           <a:p>
-            <a:pPr algn="l">
+            <a:pPr algn="r">
               <a:lnSpc>
                 <a:spcPct val="100000"/>
               </a:lnSpc>
             </a:pPr>
             <a:r>
-              <a:rPr sz="2475" b="1">
-                <a:solidFill>
-                  <a:srgbClr val="0D2B5E"/>
-                </a:solidFill>
-                <a:latin typeface="Pretendard"/>
-                <a:ea typeface="Pretendard"/>
-                <a:cs typeface="Pretendard"/>
-              </a:rPr>
-              <a:t>아키텍처 다이어그램 한 장 + 쿼리 스크립트</a:t>
-            </a:r>
-          </a:p>
-        </p:txBody>
-      </p:sp>
-      <p:sp>
-        <p:nvSpPr>
-          <p:cNvPr id="20" name="Rectangle 19"/>
-          <p:cNvSpPr/>
-          <p:nvPr/>
-        </p:nvSpPr>
-        <p:spPr>
-          <a:xfrm>
-            <a:off x="1143000" y="7715250"/>
-            <a:ext cx="47625" cy="819150"/>
-          </a:xfrm>
-          <a:prstGeom prst="rect">
-            <a:avLst/>
-          </a:prstGeom>
-          <a:solidFill>
-            <a:srgbClr val="1E5BC6"/>
-          </a:solidFill>
-          <a:ln>
-            <a:noFill/>
-          </a:ln>
-          <a:effectLst/>
-        </p:spPr>
-        <p:txBody>
-          <a:bodyPr rtlCol="0" anchor="ctr" wrap="square"/>
-          <a:lstStyle/>
-          <a:p>
-            <a:pPr algn="ctr"/>
-          </a:p>
-        </p:txBody>
-      </p:sp>
-      <p:sp>
-        <p:nvSpPr>
-          <p:cNvPr id="21" name="TextBox 20"/>
-          <p:cNvSpPr txBox="1"/>
-          <p:nvPr/>
-        </p:nvSpPr>
-        <p:spPr>
-          <a:xfrm>
-            <a:off x="1409700" y="7734300"/>
-            <a:ext cx="8572500" cy="304800"/>
-          </a:xfrm>
-          <a:prstGeom prst="rect">
-            <a:avLst/>
-          </a:prstGeom>
-          <a:noFill/>
-        </p:spPr>
-        <p:txBody>
-          <a:bodyPr wrap="square" lIns="0" rIns="0" tIns="0" bIns="0" anchor="t">
-            <a:spAutoFit/>
-          </a:bodyPr>
-          <a:lstStyle/>
-          <a:p>
-            <a:pPr algn="l">
-              <a:lnSpc>
-                <a:spcPct val="100000"/>
-              </a:lnSpc>
-            </a:pPr>
-            <a:r>
-              <a:rPr sz="1800" b="1" spc="140">
-                <a:solidFill>
-                  <a:srgbClr val="1E5BC6"/>
-                </a:solidFill>
-                <a:latin typeface="Pretendard"/>
-                <a:ea typeface="Pretendard"/>
-                <a:cs typeface="Pretendard"/>
-              </a:rPr>
-              <a:t>준비할 것</a:t>
-            </a:r>
-          </a:p>
-        </p:txBody>
-      </p:sp>
-      <p:sp>
-        <p:nvSpPr>
-          <p:cNvPr id="22" name="TextBox 21"/>
-          <p:cNvSpPr txBox="1"/>
-          <p:nvPr/>
-        </p:nvSpPr>
-        <p:spPr>
-          <a:xfrm>
-            <a:off x="1409700" y="8077200"/>
-            <a:ext cx="8572500" cy="400050"/>
-          </a:xfrm>
-          <a:prstGeom prst="rect">
-            <a:avLst/>
-          </a:prstGeom>
-          <a:noFill/>
-        </p:spPr>
-        <p:txBody>
-          <a:bodyPr wrap="square" lIns="0" rIns="0" tIns="0" bIns="0" anchor="t">
-            <a:spAutoFit/>
-          </a:bodyPr>
-          <a:lstStyle/>
-          <a:p>
-            <a:pPr algn="l">
-              <a:lnSpc>
-                <a:spcPct val="100000"/>
-              </a:lnSpc>
-            </a:pPr>
-            <a:r>
-              <a:rPr sz="2400" b="1">
-                <a:solidFill>
-                  <a:srgbClr val="0D2B5E"/>
-                </a:solidFill>
-                <a:latin typeface="Pretendard"/>
-                <a:ea typeface="Pretendard"/>
-                <a:cs typeface="Pretendard"/>
-              </a:rPr>
-              <a:t>컨테이너 5개 Up · 양쪽 1행 조회 확인</a:t>
+              <a:rPr sz="1725" b="0">
+                <a:solidFill>
+                  <a:srgbClr val="7D7D7D"/>
+                </a:solidFill>
+                <a:latin typeface="Pretendard"/>
+                <a:ea typeface="Pretendard"/>
+                <a:cs typeface="Pretendard"/>
+              </a:rPr>
+              <a:t>09</a:t>
             </a:r>
           </a:p>
         </p:txBody>
